--- a/outputs/combined-training-platform-ai-native-plan-v2.pptx
+++ b/outputs/combined-training-platform-ai-native-plan-v2.pptx
@@ -40,8 +40,9 @@
     <p:sldId id="285" r:id="rId33"/>
     <p:sldId id="286" r:id="rId34"/>
     <p:sldId id="290" r:id="rId35"/>
-    <p:sldId id="288" r:id="rId36"/>
-    <p:sldId id="289" r:id="rId37"/>
+    <p:sldId id="289" r:id="rId36"/>
+    <p:sldId id="288" r:id="rId37"/>
+    <p:sldId id="291" r:id="rId38"/>
   </p:sldIdLst>
   <p:sldSz cx="12192000" cy="6858000"/>
   <p:notesSz cx="6858000" cy="9144000"/>
@@ -37360,7 +37361,7 @@
       <p:grpSpPr/>
       <p:sp>
         <p:nvSpPr>
-          <p:cNvPr id="2" name="title"/>
+          <p:cNvPr id="2" name="ai-era-title"/>
           <p:cNvSpPr>
             <a:spLocks noGrp="1"/>
           </p:cNvSpPr>
@@ -37388,27 +37389,27 @@
           <a:p>
             <a:pPr algn="l">
               <a:buNone/>
-              <a:defRPr sz="2850" b="1">
-                <a:solidFill>
-                  <a:srgbClr val="000000"/>
-                </a:solidFill>
-                <a:latin typeface="PingFang SC"/>
-                <a:ea typeface="PingFang SC"/>
-                <a:cs typeface="PingFang SC"/>
-              </a:defRPr>
-            </a:pPr>
-            <a:r>
-              <a:rPr sz="2850" b="1">
-                <a:solidFill>
-                  <a:srgbClr val="000000"/>
-                </a:solidFill>
-                <a:latin typeface="PingFang SC"/>
-                <a:ea typeface="PingFang SC"/>
-                <a:cs typeface="PingFang SC"/>
-              </a:rPr>
-              <a:t>为什么用 AI 原生产品底座构建技术产品</a:t>
-            </a:r>
-            <a:endParaRPr sz="2850" b="1">
+              <a:defRPr sz="2775" b="1">
+                <a:solidFill>
+                  <a:srgbClr val="000000"/>
+                </a:solidFill>
+                <a:latin typeface="PingFang SC"/>
+                <a:ea typeface="PingFang SC"/>
+                <a:cs typeface="PingFang SC"/>
+              </a:defRPr>
+            </a:pPr>
+            <a:r>
+              <a:rPr sz="2775" b="1">
+                <a:solidFill>
+                  <a:srgbClr val="000000"/>
+                </a:solidFill>
+                <a:latin typeface="PingFang SC"/>
+                <a:ea typeface="PingFang SC"/>
+                <a:cs typeface="PingFang SC"/>
+              </a:rPr>
+              <a:t>AI 时代，智能是刚需，速度即竞争力</a:t>
+            </a:r>
+            <a:endParaRPr sz="2775" b="1">
               <a:solidFill>
                 <a:srgbClr val="000000"/>
               </a:solidFill>
@@ -37429,8 +37430,8 @@
         </p:nvSpPr>
         <p:spPr>
           <a:xfrm>
-            <a:off x="400050" y="1400175"/>
-            <a:ext cx="10382250" cy="285750"/>
+            <a:off x="400050" y="1390650"/>
+            <a:ext cx="10477500" cy="285750"/>
           </a:xfrm>
           <a:prstGeom prst="rect">
             <a:avLst/>
@@ -37443,13 +37444,13 @@
         </p:spPr>
         <p:txBody>
           <a:bodyPr anchor="ctr">
-            <a:normAutofit fontScale="94444"/>
+            <a:normAutofit fontScale="89474"/>
           </a:bodyPr>
           <a:lstStyle/>
           <a:p>
             <a:pPr algn="l">
               <a:buNone/>
-              <a:defRPr sz="1350">
+              <a:defRPr sz="1425" b="1">
                 <a:solidFill>
                   <a:srgbClr val="5B6472"/>
                 </a:solidFill>
@@ -37459,7 +37460,7 @@
               </a:defRPr>
             </a:pPr>
             <a:r>
-              <a:rPr sz="1350">
+              <a:rPr sz="1425" b="1">
                 <a:solidFill>
                   <a:srgbClr val="5B6472"/>
                 </a:solidFill>
@@ -37467,9 +37468,9 @@
                 <a:ea typeface="PingFang SC"/>
                 <a:cs typeface="PingFang SC"/>
               </a:rPr>
-              <a:t>底座能力优先复用和装配，让应用更智能、开发更快、场景更广、部署更轻、运营可计量。</a:t>
-            </a:r>
-            <a:endParaRPr sz="1350">
+              <a:t>AI 原生产品底座 + AI 原生开发模式，是快速形成产品矩阵、试错验证和持续迭代的基础。</a:t>
+            </a:r>
+            <a:endParaRPr sz="1425" b="1">
               <a:solidFill>
                 <a:srgbClr val="5B6472"/>
               </a:solidFill>
@@ -37507,26 +37508,26 @@
       </p:sp>
       <p:sp>
         <p:nvSpPr>
-          <p:cNvPr id="5" name="reason-1-card"/>
-          <p:cNvSpPr>
-            <a:spLocks noGrp="1"/>
-          </p:cNvSpPr>
-          <p:nvPr/>
-        </p:nvSpPr>
-        <p:spPr>
-          <a:xfrm>
-            <a:off x="704850" y="2190750"/>
-            <a:ext cx="3409950" cy="1466850"/>
+          <p:cNvPr id="5" name="stage-1-card"/>
+          <p:cNvSpPr>
+            <a:spLocks noGrp="1"/>
+          </p:cNvSpPr>
+          <p:nvPr/>
+        </p:nvSpPr>
+        <p:spPr>
+          <a:xfrm>
+            <a:off x="742950" y="2381250"/>
+            <a:ext cx="3143250" cy="2266950"/>
           </a:xfrm>
           <a:prstGeom prst="roundRect">
             <a:avLst>
-              <a:gd name="adj" fmla="val 3896"/>
+              <a:gd name="adj" fmla="val 2521"/>
             </a:avLst>
           </a:prstGeom>
           <a:solidFill>
             <a:srgbClr val="F3F6FA"/>
           </a:solidFill>
-          <a:ln w="10954">
+          <a:ln w="10478">
             <a:solidFill>
               <a:srgbClr val="C9CED8"/>
             </a:solidFill>
@@ -37536,15 +37537,15 @@
       </p:sp>
       <p:sp>
         <p:nvSpPr>
-          <p:cNvPr id="6" name="reason-1-num-bg"/>
-          <p:cNvSpPr>
-            <a:spLocks noGrp="1"/>
-          </p:cNvSpPr>
-          <p:nvPr/>
-        </p:nvSpPr>
-        <p:spPr>
-          <a:xfrm>
-            <a:off x="933450" y="2419350"/>
+          <p:cNvPr id="6" name="stage-1-badge"/>
+          <p:cNvSpPr>
+            <a:spLocks noGrp="1"/>
+          </p:cNvSpPr>
+          <p:nvPr/>
+        </p:nvSpPr>
+        <p:spPr>
+          <a:xfrm>
+            <a:off x="990600" y="2647950"/>
             <a:ext cx="400050" cy="400050"/>
           </a:xfrm>
           <a:prstGeom prst="ellipse">
@@ -37563,16 +37564,16 @@
       </p:sp>
       <p:sp>
         <p:nvSpPr>
-          <p:cNvPr id="7" name="reason-1-num"/>
-          <p:cNvSpPr>
-            <a:spLocks noGrp="1"/>
-          </p:cNvSpPr>
-          <p:nvPr/>
-        </p:nvSpPr>
-        <p:spPr>
-          <a:xfrm>
-            <a:off x="933450" y="2476500"/>
-            <a:ext cx="400050" cy="238125"/>
+          <p:cNvPr id="7" name="stage-1-badge-text"/>
+          <p:cNvSpPr>
+            <a:spLocks noGrp="1"/>
+          </p:cNvSpPr>
+          <p:nvPr/>
+        </p:nvSpPr>
+        <p:spPr>
+          <a:xfrm>
+            <a:off x="990600" y="2705100"/>
+            <a:ext cx="400050" cy="247650"/>
           </a:xfrm>
           <a:prstGeom prst="rect">
             <a:avLst/>
@@ -37585,13 +37586,13 @@
         </p:spPr>
         <p:txBody>
           <a:bodyPr anchor="ctr">
-            <a:normAutofit fontScale="75490"/>
+            <a:normAutofit fontScale="85417"/>
           </a:bodyPr>
           <a:lstStyle/>
           <a:p>
             <a:pPr algn="ctr">
               <a:buNone/>
-              <a:defRPr sz="1275" b="1">
+              <a:defRPr sz="1200" b="1">
                 <a:solidFill>
                   <a:srgbClr val="FFFFFF"/>
                 </a:solidFill>
@@ -37601,7 +37602,7 @@
               </a:defRPr>
             </a:pPr>
             <a:r>
-              <a:rPr sz="1275" b="1">
+              <a:rPr sz="1200" b="1">
                 <a:solidFill>
                   <a:srgbClr val="FFFFFF"/>
                 </a:solidFill>
@@ -37611,7 +37612,7 @@
               </a:rPr>
               <a:t>01</a:t>
             </a:r>
-            <a:endParaRPr sz="1275" b="1">
+            <a:endParaRPr sz="1200" b="1">
               <a:solidFill>
                 <a:srgbClr val="FFFFFF"/>
               </a:solidFill>
@@ -37624,16 +37625,16 @@
       </p:sp>
       <p:sp>
         <p:nvSpPr>
-          <p:cNvPr id="8" name="reason-1-title"/>
-          <p:cNvSpPr>
-            <a:spLocks noGrp="1"/>
-          </p:cNvSpPr>
-          <p:nvPr/>
-        </p:nvSpPr>
-        <p:spPr>
-          <a:xfrm>
-            <a:off x="1485900" y="2390775"/>
-            <a:ext cx="2400300" cy="419100"/>
+          <p:cNvPr id="8" name="stage-1-title"/>
+          <p:cNvSpPr>
+            <a:spLocks noGrp="1"/>
+          </p:cNvSpPr>
+          <p:nvPr/>
+        </p:nvSpPr>
+        <p:spPr>
+          <a:xfrm>
+            <a:off x="1543050" y="2628900"/>
+            <a:ext cx="2038350" cy="304800"/>
           </a:xfrm>
           <a:prstGeom prst="rect">
             <a:avLst/>
@@ -37646,7 +37647,7 @@
         </p:spPr>
         <p:txBody>
           <a:bodyPr anchor="ctr">
-            <a:normAutofit/>
+            <a:normAutofit fontScale="81159"/>
           </a:bodyPr>
           <a:lstStyle/>
           <a:p>
@@ -37670,7 +37671,7 @@
                 <a:ea typeface="PingFang SC"/>
                 <a:cs typeface="PingFang SC"/>
               </a:rPr>
-              <a:t>应用智能</a:t>
+              <a:t>共同基础</a:t>
             </a:r>
             <a:endParaRPr sz="1725" b="1">
               <a:solidFill>
@@ -37685,18 +37686,79 @@
       </p:sp>
       <p:sp>
         <p:nvSpPr>
-          <p:cNvPr id="9" name="reason-1-bullet-0"/>
-          <p:cNvSpPr>
-            <a:spLocks noGrp="1"/>
-          </p:cNvSpPr>
-          <p:nvPr/>
-        </p:nvSpPr>
-        <p:spPr>
-          <a:xfrm>
-            <a:off x="1504950" y="3009900"/>
-            <a:ext cx="76200" cy="76200"/>
-          </a:xfrm>
-          <a:prstGeom prst="ellipse">
+          <p:cNvPr id="9" name="stage-1-subtitle"/>
+          <p:cNvSpPr>
+            <a:spLocks noGrp="1"/>
+          </p:cNvSpPr>
+          <p:nvPr/>
+        </p:nvSpPr>
+        <p:spPr>
+          <a:xfrm>
+            <a:off x="1543050" y="2990850"/>
+            <a:ext cx="2038350" cy="381000"/>
+          </a:xfrm>
+          <a:prstGeom prst="rect">
+            <a:avLst/>
+          </a:prstGeom>
+          <a:noFill/>
+          <a:ln w="0">
+            <a:noFill/>
+            <a:prstDash val="solid"/>
+          </a:ln>
+        </p:spPr>
+        <p:txBody>
+          <a:bodyPr anchor="t">
+            <a:normAutofit fontScale="81685"/>
+          </a:bodyPr>
+          <a:lstStyle/>
+          <a:p>
+            <a:pPr algn="l">
+              <a:buNone/>
+              <a:defRPr sz="1165" b="1">
+                <a:solidFill>
+                  <a:srgbClr val="5B6472"/>
+                </a:solidFill>
+                <a:latin typeface="PingFang SC"/>
+                <a:ea typeface="PingFang SC"/>
+                <a:cs typeface="PingFang SC"/>
+              </a:defRPr>
+            </a:pPr>
+            <a:r>
+              <a:rPr sz="1165" b="1">
+                <a:solidFill>
+                  <a:srgbClr val="5B6472"/>
+                </a:solidFill>
+                <a:latin typeface="PingFang SC"/>
+                <a:ea typeface="PingFang SC"/>
+                <a:cs typeface="PingFang SC"/>
+              </a:rPr>
+              <a:t>AI 原生产品底座 + AI 原生开发模式</a:t>
+            </a:r>
+            <a:endParaRPr sz="1165" b="1">
+              <a:solidFill>
+                <a:srgbClr val="5B6472"/>
+              </a:solidFill>
+              <a:latin typeface="PingFang SC"/>
+              <a:ea typeface="PingFang SC"/>
+              <a:cs typeface="PingFang SC"/>
+            </a:endParaRPr>
+          </a:p>
+        </p:txBody>
+      </p:sp>
+      <p:sp>
+        <p:nvSpPr>
+          <p:cNvPr id="10" name="stage-1-bullet-0-dot"/>
+          <p:cNvSpPr>
+            <a:spLocks noGrp="1"/>
+          </p:cNvSpPr>
+          <p:nvPr/>
+        </p:nvSpPr>
+        <p:spPr>
+          <a:xfrm>
+            <a:off x="1543050" y="3657600"/>
+            <a:ext cx="57150" cy="57150"/>
+          </a:xfrm>
+          <a:prstGeom prst="rect">
             <a:avLst/>
           </a:prstGeom>
           <a:solidFill>
@@ -37712,16 +37774,16 @@
       </p:sp>
       <p:sp>
         <p:nvSpPr>
-          <p:cNvPr id="10" name="reason-1-bullet-0-text"/>
-          <p:cNvSpPr>
-            <a:spLocks noGrp="1"/>
-          </p:cNvSpPr>
-          <p:nvPr/>
-        </p:nvSpPr>
-        <p:spPr>
-          <a:xfrm>
-            <a:off x="1714500" y="2914650"/>
-            <a:ext cx="2133600" cy="266700"/>
+          <p:cNvPr id="11" name="stage-1-bullet-0-text"/>
+          <p:cNvSpPr>
+            <a:spLocks noGrp="1"/>
+          </p:cNvSpPr>
+          <p:nvPr/>
+        </p:nvSpPr>
+        <p:spPr>
+          <a:xfrm>
+            <a:off x="1619250" y="3543300"/>
+            <a:ext cx="2171700" cy="266700"/>
           </a:xfrm>
           <a:prstGeom prst="rect">
             <a:avLst/>
@@ -37734,13 +37796,13 @@
         </p:spPr>
         <p:txBody>
           <a:bodyPr anchor="t">
-            <a:normAutofit fontScale="85185"/>
+            <a:normAutofit fontScale="98882" lnSpcReduction="10000"/>
           </a:bodyPr>
           <a:lstStyle/>
           <a:p>
             <a:pPr algn="l">
               <a:buNone/>
-              <a:defRPr sz="1350" b="1">
+              <a:defRPr sz="1165" b="1">
                 <a:solidFill>
                   <a:srgbClr val="5B6472"/>
                 </a:solidFill>
@@ -37750,7 +37812,7 @@
               </a:defRPr>
             </a:pPr>
             <a:r>
-              <a:rPr sz="1350" b="1">
+              <a:rPr sz="1165" b="1">
                 <a:solidFill>
                   <a:srgbClr val="5B6472"/>
                 </a:solidFill>
@@ -37758,9 +37820,9 @@
                 <a:ea typeface="PingFang SC"/>
                 <a:cs typeface="PingFang SC"/>
               </a:rPr>
-              <a:t>AI 底层赋能业务</a:t>
-            </a:r>
-            <a:endParaRPr sz="1350" b="1">
+              <a:t>底层架构可复用</a:t>
+            </a:r>
+            <a:endParaRPr sz="1165" b="1">
               <a:solidFill>
                 <a:srgbClr val="5B6472"/>
               </a:solidFill>
@@ -37773,26 +37835,229 @@
       </p:sp>
       <p:sp>
         <p:nvSpPr>
-          <p:cNvPr id="11" name="reason-2-card"/>
-          <p:cNvSpPr>
-            <a:spLocks noGrp="1"/>
-          </p:cNvSpPr>
-          <p:nvPr/>
-        </p:nvSpPr>
-        <p:spPr>
-          <a:xfrm>
-            <a:off x="4400550" y="2190750"/>
-            <a:ext cx="3409950" cy="2038350"/>
+          <p:cNvPr id="12" name="stage-1-bullet-1-dot"/>
+          <p:cNvSpPr>
+            <a:spLocks noGrp="1"/>
+          </p:cNvSpPr>
+          <p:nvPr/>
+        </p:nvSpPr>
+        <p:spPr>
+          <a:xfrm>
+            <a:off x="1543050" y="4000500"/>
+            <a:ext cx="57150" cy="57150"/>
+          </a:xfrm>
+          <a:prstGeom prst="rect">
+            <a:avLst/>
+          </a:prstGeom>
+          <a:solidFill>
+            <a:srgbClr val="2F83FF"/>
+          </a:solidFill>
+          <a:ln w="0">
+            <a:solidFill>
+              <a:srgbClr val="2F83FF"/>
+            </a:solidFill>
+            <a:prstDash val="solid"/>
+          </a:ln>
+        </p:spPr>
+      </p:sp>
+      <p:sp>
+        <p:nvSpPr>
+          <p:cNvPr id="13" name="stage-1-bullet-1-text"/>
+          <p:cNvSpPr>
+            <a:spLocks noGrp="1"/>
+          </p:cNvSpPr>
+          <p:nvPr/>
+        </p:nvSpPr>
+        <p:spPr>
+          <a:xfrm>
+            <a:off x="1617980" y="3886200"/>
+            <a:ext cx="2172970" cy="266700"/>
+          </a:xfrm>
+          <a:prstGeom prst="rect">
+            <a:avLst/>
+          </a:prstGeom>
+          <a:noFill/>
+          <a:ln w="0">
+            <a:noFill/>
+            <a:prstDash val="solid"/>
+          </a:ln>
+        </p:spPr>
+        <p:txBody>
+          <a:bodyPr anchor="t">
+            <a:normAutofit fontScale="98882" lnSpcReduction="10000"/>
+          </a:bodyPr>
+          <a:lstStyle/>
+          <a:p>
+            <a:pPr algn="l">
+              <a:buNone/>
+              <a:defRPr sz="1165" b="1">
+                <a:solidFill>
+                  <a:srgbClr val="5B6472"/>
+                </a:solidFill>
+                <a:latin typeface="PingFang SC"/>
+                <a:ea typeface="PingFang SC"/>
+                <a:cs typeface="PingFang SC"/>
+              </a:defRPr>
+            </a:pPr>
+            <a:r>
+              <a:rPr sz="1165" b="1">
+                <a:solidFill>
+                  <a:srgbClr val="5B6472"/>
+                </a:solidFill>
+                <a:latin typeface="PingFang SC"/>
+                <a:ea typeface="PingFang SC"/>
+                <a:cs typeface="PingFang SC"/>
+              </a:rPr>
+              <a:t>原子组件可装配</a:t>
+            </a:r>
+            <a:endParaRPr sz="1165" b="1">
+              <a:solidFill>
+                <a:srgbClr val="5B6472"/>
+              </a:solidFill>
+              <a:latin typeface="PingFang SC"/>
+              <a:ea typeface="PingFang SC"/>
+              <a:cs typeface="PingFang SC"/>
+            </a:endParaRPr>
+          </a:p>
+        </p:txBody>
+      </p:sp>
+      <p:sp>
+        <p:nvSpPr>
+          <p:cNvPr id="14" name="stage-1-bullet-2-dot"/>
+          <p:cNvSpPr>
+            <a:spLocks noGrp="1"/>
+          </p:cNvSpPr>
+          <p:nvPr/>
+        </p:nvSpPr>
+        <p:spPr>
+          <a:xfrm>
+            <a:off x="1543050" y="4343400"/>
+            <a:ext cx="57150" cy="57150"/>
+          </a:xfrm>
+          <a:prstGeom prst="rect">
+            <a:avLst/>
+          </a:prstGeom>
+          <a:solidFill>
+            <a:srgbClr val="2F83FF"/>
+          </a:solidFill>
+          <a:ln w="0">
+            <a:solidFill>
+              <a:srgbClr val="2F83FF"/>
+            </a:solidFill>
+            <a:prstDash val="solid"/>
+          </a:ln>
+        </p:spPr>
+      </p:sp>
+      <p:sp>
+        <p:nvSpPr>
+          <p:cNvPr id="15" name="stage-1-bullet-2-text"/>
+          <p:cNvSpPr>
+            <a:spLocks noGrp="1"/>
+          </p:cNvSpPr>
+          <p:nvPr/>
+        </p:nvSpPr>
+        <p:spPr>
+          <a:xfrm>
+            <a:off x="1617980" y="4229100"/>
+            <a:ext cx="2172970" cy="266700"/>
+          </a:xfrm>
+          <a:prstGeom prst="rect">
+            <a:avLst/>
+          </a:prstGeom>
+          <a:noFill/>
+          <a:ln w="0">
+            <a:noFill/>
+            <a:prstDash val="solid"/>
+          </a:ln>
+        </p:spPr>
+        <p:txBody>
+          <a:bodyPr anchor="t">
+            <a:normAutofit fontScale="98882" lnSpcReduction="10000"/>
+          </a:bodyPr>
+          <a:lstStyle/>
+          <a:p>
+            <a:pPr algn="l">
+              <a:buNone/>
+              <a:defRPr sz="1165" b="1">
+                <a:solidFill>
+                  <a:srgbClr val="5B6472"/>
+                </a:solidFill>
+                <a:latin typeface="PingFang SC"/>
+                <a:ea typeface="PingFang SC"/>
+                <a:cs typeface="PingFang SC"/>
+              </a:defRPr>
+            </a:pPr>
+            <a:r>
+              <a:rPr sz="1165" b="1">
+                <a:solidFill>
+                  <a:srgbClr val="5B6472"/>
+                </a:solidFill>
+                <a:latin typeface="PingFang SC"/>
+                <a:ea typeface="PingFang SC"/>
+                <a:cs typeface="PingFang SC"/>
+              </a:rPr>
+              <a:t>能力沉淀可迁移</a:t>
+            </a:r>
+            <a:endParaRPr sz="1165" b="1">
+              <a:solidFill>
+                <a:srgbClr val="5B6472"/>
+              </a:solidFill>
+              <a:latin typeface="PingFang SC"/>
+              <a:ea typeface="PingFang SC"/>
+              <a:cs typeface="PingFang SC"/>
+            </a:endParaRPr>
+          </a:p>
+        </p:txBody>
+      </p:sp>
+      <p:sp>
+        <p:nvSpPr>
+          <p:cNvPr id="16" name="arrow-1"/>
+          <p:cNvSpPr>
+            <a:spLocks noGrp="1"/>
+          </p:cNvSpPr>
+          <p:nvPr/>
+        </p:nvSpPr>
+        <p:spPr>
+          <a:xfrm>
+            <a:off x="3976370" y="3352800"/>
+            <a:ext cx="514350" cy="266700"/>
+          </a:xfrm>
+          <a:prstGeom prst="rightArrow">
+            <a:avLst/>
+          </a:prstGeom>
+          <a:solidFill>
+            <a:srgbClr val="B7BDC8"/>
+          </a:solidFill>
+          <a:ln w="0">
+            <a:solidFill>
+              <a:srgbClr val="B7BDC8"/>
+            </a:solidFill>
+            <a:prstDash val="solid"/>
+          </a:ln>
+        </p:spPr>
+      </p:sp>
+      <p:sp>
+        <p:nvSpPr>
+          <p:cNvPr id="17" name="stage-2-card"/>
+          <p:cNvSpPr>
+            <a:spLocks noGrp="1"/>
+          </p:cNvSpPr>
+          <p:nvPr/>
+        </p:nvSpPr>
+        <p:spPr>
+          <a:xfrm>
+            <a:off x="4524375" y="2381250"/>
+            <a:ext cx="3143250" cy="2266950"/>
           </a:xfrm>
           <a:prstGeom prst="roundRect">
             <a:avLst>
-              <a:gd name="adj" fmla="val 2804"/>
+              <a:gd name="adj" fmla="val 2521"/>
             </a:avLst>
           </a:prstGeom>
           <a:solidFill>
             <a:srgbClr val="F3F6FA"/>
           </a:solidFill>
-          <a:ln w="10954">
+          <a:ln w="10478">
             <a:solidFill>
               <a:srgbClr val="C9CED8"/>
             </a:solidFill>
@@ -37802,15 +38067,15 @@
       </p:sp>
       <p:sp>
         <p:nvSpPr>
-          <p:cNvPr id="12" name="reason-2-num-bg"/>
-          <p:cNvSpPr>
-            <a:spLocks noGrp="1"/>
-          </p:cNvSpPr>
-          <p:nvPr/>
-        </p:nvSpPr>
-        <p:spPr>
-          <a:xfrm>
-            <a:off x="4629150" y="2419350"/>
+          <p:cNvPr id="18" name="stage-2-badge"/>
+          <p:cNvSpPr>
+            <a:spLocks noGrp="1"/>
+          </p:cNvSpPr>
+          <p:nvPr/>
+        </p:nvSpPr>
+        <p:spPr>
+          <a:xfrm>
+            <a:off x="4772025" y="2647950"/>
             <a:ext cx="400050" cy="400050"/>
           </a:xfrm>
           <a:prstGeom prst="ellipse">
@@ -37829,16 +38094,16 @@
       </p:sp>
       <p:sp>
         <p:nvSpPr>
-          <p:cNvPr id="13" name="reason-2-num"/>
-          <p:cNvSpPr>
-            <a:spLocks noGrp="1"/>
-          </p:cNvSpPr>
-          <p:nvPr/>
-        </p:nvSpPr>
-        <p:spPr>
-          <a:xfrm>
-            <a:off x="4629150" y="2476500"/>
-            <a:ext cx="400050" cy="238125"/>
+          <p:cNvPr id="19" name="stage-2-badge-text"/>
+          <p:cNvSpPr>
+            <a:spLocks noGrp="1"/>
+          </p:cNvSpPr>
+          <p:nvPr/>
+        </p:nvSpPr>
+        <p:spPr>
+          <a:xfrm>
+            <a:off x="4772025" y="2705100"/>
+            <a:ext cx="400050" cy="247650"/>
           </a:xfrm>
           <a:prstGeom prst="rect">
             <a:avLst/>
@@ -37851,13 +38116,13 @@
         </p:spPr>
         <p:txBody>
           <a:bodyPr anchor="ctr">
-            <a:normAutofit fontScale="75490"/>
+            <a:normAutofit fontScale="85417"/>
           </a:bodyPr>
           <a:lstStyle/>
           <a:p>
             <a:pPr algn="ctr">
               <a:buNone/>
-              <a:defRPr sz="1275" b="1">
+              <a:defRPr sz="1200" b="1">
                 <a:solidFill>
                   <a:srgbClr val="FFFFFF"/>
                 </a:solidFill>
@@ -37867,7 +38132,7 @@
               </a:defRPr>
             </a:pPr>
             <a:r>
-              <a:rPr sz="1275" b="1">
+              <a:rPr sz="1200" b="1">
                 <a:solidFill>
                   <a:srgbClr val="FFFFFF"/>
                 </a:solidFill>
@@ -37877,7 +38142,7 @@
               </a:rPr>
               <a:t>02</a:t>
             </a:r>
-            <a:endParaRPr sz="1275" b="1">
+            <a:endParaRPr sz="1200" b="1">
               <a:solidFill>
                 <a:srgbClr val="FFFFFF"/>
               </a:solidFill>
@@ -37890,16 +38155,16 @@
       </p:sp>
       <p:sp>
         <p:nvSpPr>
-          <p:cNvPr id="14" name="reason-2-title"/>
-          <p:cNvSpPr>
-            <a:spLocks noGrp="1"/>
-          </p:cNvSpPr>
-          <p:nvPr/>
-        </p:nvSpPr>
-        <p:spPr>
-          <a:xfrm>
-            <a:off x="5181600" y="2390775"/>
-            <a:ext cx="2400300" cy="419100"/>
+          <p:cNvPr id="20" name="stage-2-title"/>
+          <p:cNvSpPr>
+            <a:spLocks noGrp="1"/>
+          </p:cNvSpPr>
+          <p:nvPr/>
+        </p:nvSpPr>
+        <p:spPr>
+          <a:xfrm>
+            <a:off x="5324475" y="2628900"/>
+            <a:ext cx="2038350" cy="304800"/>
           </a:xfrm>
           <a:prstGeom prst="rect">
             <a:avLst/>
@@ -37912,7 +38177,7 @@
         </p:spPr>
         <p:txBody>
           <a:bodyPr anchor="ctr">
-            <a:normAutofit/>
+            <a:normAutofit fontScale="81159"/>
           </a:bodyPr>
           <a:lstStyle/>
           <a:p>
@@ -37936,7 +38201,7 @@
                 <a:ea typeface="PingFang SC"/>
                 <a:cs typeface="PingFang SC"/>
               </a:rPr>
-              <a:t>开发快</a:t>
+              <a:t>产品矩阵</a:t>
             </a:r>
             <a:endParaRPr sz="1725" b="1">
               <a:solidFill>
@@ -37951,18 +38216,79 @@
       </p:sp>
       <p:sp>
         <p:nvSpPr>
-          <p:cNvPr id="15" name="reason-2-bullet-0"/>
-          <p:cNvSpPr>
-            <a:spLocks noGrp="1"/>
-          </p:cNvSpPr>
-          <p:nvPr/>
-        </p:nvSpPr>
-        <p:spPr>
-          <a:xfrm>
-            <a:off x="5200650" y="3009900"/>
-            <a:ext cx="76200" cy="76200"/>
-          </a:xfrm>
-          <a:prstGeom prst="ellipse">
+          <p:cNvPr id="21" name="stage-2-subtitle"/>
+          <p:cNvSpPr>
+            <a:spLocks noGrp="1"/>
+          </p:cNvSpPr>
+          <p:nvPr/>
+        </p:nvSpPr>
+        <p:spPr>
+          <a:xfrm>
+            <a:off x="5324475" y="2990850"/>
+            <a:ext cx="2038350" cy="381000"/>
+          </a:xfrm>
+          <a:prstGeom prst="rect">
+            <a:avLst/>
+          </a:prstGeom>
+          <a:noFill/>
+          <a:ln w="0">
+            <a:noFill/>
+            <a:prstDash val="solid"/>
+          </a:ln>
+        </p:spPr>
+        <p:txBody>
+          <a:bodyPr anchor="t">
+            <a:normAutofit fontScale="81685"/>
+          </a:bodyPr>
+          <a:lstStyle/>
+          <a:p>
+            <a:pPr algn="l">
+              <a:buNone/>
+              <a:defRPr sz="1165" b="1">
+                <a:solidFill>
+                  <a:srgbClr val="5B6472"/>
+                </a:solidFill>
+                <a:latin typeface="PingFang SC"/>
+                <a:ea typeface="PingFang SC"/>
+                <a:cs typeface="PingFang SC"/>
+              </a:defRPr>
+            </a:pPr>
+            <a:r>
+              <a:rPr sz="1165" b="1">
+                <a:solidFill>
+                  <a:srgbClr val="5B6472"/>
+                </a:solidFill>
+                <a:latin typeface="PingFang SC"/>
+                <a:ea typeface="PingFang SC"/>
+                <a:cs typeface="PingFang SC"/>
+              </a:rPr>
+              <a:t>面向不同垂直场景，快速包装成解决方案</a:t>
+            </a:r>
+            <a:endParaRPr sz="1165" b="1">
+              <a:solidFill>
+                <a:srgbClr val="5B6472"/>
+              </a:solidFill>
+              <a:latin typeface="PingFang SC"/>
+              <a:ea typeface="PingFang SC"/>
+              <a:cs typeface="PingFang SC"/>
+            </a:endParaRPr>
+          </a:p>
+        </p:txBody>
+      </p:sp>
+      <p:sp>
+        <p:nvSpPr>
+          <p:cNvPr id="22" name="stage-2-bullet-0-dot"/>
+          <p:cNvSpPr>
+            <a:spLocks noGrp="1"/>
+          </p:cNvSpPr>
+          <p:nvPr/>
+        </p:nvSpPr>
+        <p:spPr>
+          <a:xfrm>
+            <a:off x="5147945" y="3571240"/>
+            <a:ext cx="57150" cy="57150"/>
+          </a:xfrm>
+          <a:prstGeom prst="rect">
             <a:avLst/>
           </a:prstGeom>
           <a:solidFill>
@@ -37978,16 +38304,16 @@
       </p:sp>
       <p:sp>
         <p:nvSpPr>
-          <p:cNvPr id="16" name="reason-2-bullet-0-text"/>
-          <p:cNvSpPr>
-            <a:spLocks noGrp="1"/>
-          </p:cNvSpPr>
-          <p:nvPr/>
-        </p:nvSpPr>
-        <p:spPr>
-          <a:xfrm>
-            <a:off x="5410200" y="2914650"/>
-            <a:ext cx="2133600" cy="266700"/>
+          <p:cNvPr id="23" name="stage-2-bullet-0-text"/>
+          <p:cNvSpPr>
+            <a:spLocks noGrp="1"/>
+          </p:cNvSpPr>
+          <p:nvPr/>
+        </p:nvSpPr>
+        <p:spPr>
+          <a:xfrm>
+            <a:off x="5219700" y="3471545"/>
+            <a:ext cx="2137410" cy="266700"/>
           </a:xfrm>
           <a:prstGeom prst="rect">
             <a:avLst/>
@@ -38000,13 +38326,13 @@
         </p:spPr>
         <p:txBody>
           <a:bodyPr anchor="t">
-            <a:normAutofit fontScale="87586"/>
+            <a:normAutofit fontScale="90943"/>
           </a:bodyPr>
           <a:lstStyle/>
           <a:p>
             <a:pPr algn="l">
               <a:buNone/>
-              <a:defRPr sz="1315" b="1">
+              <a:defRPr sz="1110" b="1">
                 <a:solidFill>
                   <a:srgbClr val="5B6472"/>
                 </a:solidFill>
@@ -38016,7 +38342,7 @@
               </a:defRPr>
             </a:pPr>
             <a:r>
-              <a:rPr sz="1315" b="1">
+              <a:rPr sz="1110" b="1">
                 <a:solidFill>
                   <a:srgbClr val="5B6472"/>
                 </a:solidFill>
@@ -38024,9 +38350,9 @@
                 <a:ea typeface="PingFang SC"/>
                 <a:cs typeface="PingFang SC"/>
               </a:rPr>
-              <a:t>更多原子组件开箱即用</a:t>
-            </a:r>
-            <a:endParaRPr sz="1315" b="1">
+              <a:t>通答教学平台 / 通答智能体平台</a:t>
+            </a:r>
+            <a:endParaRPr sz="1110" b="1">
               <a:solidFill>
                 <a:srgbClr val="5B6472"/>
               </a:solidFill>
@@ -38039,18 +38365,18 @@
       </p:sp>
       <p:sp>
         <p:nvSpPr>
-          <p:cNvPr id="17" name="reason-2-bullet-1"/>
-          <p:cNvSpPr>
-            <a:spLocks noGrp="1"/>
-          </p:cNvSpPr>
-          <p:nvPr/>
-        </p:nvSpPr>
-        <p:spPr>
-          <a:xfrm>
-            <a:off x="5200650" y="3333750"/>
-            <a:ext cx="76200" cy="76200"/>
-          </a:xfrm>
-          <a:prstGeom prst="ellipse">
+          <p:cNvPr id="24" name="stage-2-bullet-1-dot"/>
+          <p:cNvSpPr>
+            <a:spLocks noGrp="1"/>
+          </p:cNvSpPr>
+          <p:nvPr/>
+        </p:nvSpPr>
+        <p:spPr>
+          <a:xfrm>
+            <a:off x="5147945" y="3914140"/>
+            <a:ext cx="57150" cy="57150"/>
+          </a:xfrm>
+          <a:prstGeom prst="rect">
             <a:avLst/>
           </a:prstGeom>
           <a:solidFill>
@@ -38066,16 +38392,16 @@
       </p:sp>
       <p:sp>
         <p:nvSpPr>
-          <p:cNvPr id="18" name="reason-2-bullet-1-text"/>
-          <p:cNvSpPr>
-            <a:spLocks noGrp="1"/>
-          </p:cNvSpPr>
-          <p:nvPr/>
-        </p:nvSpPr>
-        <p:spPr>
-          <a:xfrm>
-            <a:off x="5410200" y="3238500"/>
-            <a:ext cx="2133600" cy="266700"/>
+          <p:cNvPr id="25" name="stage-2-bullet-1-text"/>
+          <p:cNvSpPr>
+            <a:spLocks noGrp="1"/>
+          </p:cNvSpPr>
+          <p:nvPr/>
+        </p:nvSpPr>
+        <p:spPr>
+          <a:xfrm>
+            <a:off x="5220335" y="3814445"/>
+            <a:ext cx="2136775" cy="266700"/>
           </a:xfrm>
           <a:prstGeom prst="rect">
             <a:avLst/>
@@ -38088,13 +38414,13 @@
         </p:spPr>
         <p:txBody>
           <a:bodyPr anchor="t">
-            <a:normAutofit fontScale="87586"/>
+            <a:normAutofit fontScale="90943"/>
           </a:bodyPr>
           <a:lstStyle/>
           <a:p>
             <a:pPr algn="l">
               <a:buNone/>
-              <a:defRPr sz="1315" b="1">
+              <a:defRPr sz="1110" b="1">
                 <a:solidFill>
                   <a:srgbClr val="5B6472"/>
                 </a:solidFill>
@@ -38104,7 +38430,7 @@
               </a:defRPr>
             </a:pPr>
             <a:r>
-              <a:rPr sz="1315" b="1">
+              <a:rPr sz="1110" b="1">
                 <a:solidFill>
                   <a:srgbClr val="5B6472"/>
                 </a:solidFill>
@@ -38112,9 +38438,9 @@
                 <a:ea typeface="PingFang SC"/>
                 <a:cs typeface="PingFang SC"/>
               </a:rPr>
-              <a:t>三层架构支撑快速开发</a:t>
-            </a:r>
-            <a:endParaRPr sz="1315" b="1">
+              <a:t>中小学服务平台 / 教师发展平台</a:t>
+            </a:r>
+            <a:endParaRPr sz="1110" b="1">
               <a:solidFill>
                 <a:srgbClr val="5B6472"/>
               </a:solidFill>
@@ -38127,18 +38453,18 @@
       </p:sp>
       <p:sp>
         <p:nvSpPr>
-          <p:cNvPr id="19" name="reason-2-bullet-2"/>
-          <p:cNvSpPr>
-            <a:spLocks noGrp="1"/>
-          </p:cNvSpPr>
-          <p:nvPr/>
-        </p:nvSpPr>
-        <p:spPr>
-          <a:xfrm>
-            <a:off x="5200650" y="3657600"/>
-            <a:ext cx="76200" cy="76200"/>
-          </a:xfrm>
-          <a:prstGeom prst="ellipse">
+          <p:cNvPr id="26" name="stage-2-bullet-2-dot"/>
+          <p:cNvSpPr>
+            <a:spLocks noGrp="1"/>
+          </p:cNvSpPr>
+          <p:nvPr/>
+        </p:nvSpPr>
+        <p:spPr>
+          <a:xfrm>
+            <a:off x="5147945" y="4257040"/>
+            <a:ext cx="57150" cy="57150"/>
+          </a:xfrm>
+          <a:prstGeom prst="rect">
             <a:avLst/>
           </a:prstGeom>
           <a:solidFill>
@@ -38154,16 +38480,16 @@
       </p:sp>
       <p:sp>
         <p:nvSpPr>
-          <p:cNvPr id="20" name="reason-2-bullet-2-text"/>
-          <p:cNvSpPr>
-            <a:spLocks noGrp="1"/>
-          </p:cNvSpPr>
-          <p:nvPr/>
-        </p:nvSpPr>
-        <p:spPr>
-          <a:xfrm>
-            <a:off x="5410200" y="3562350"/>
-            <a:ext cx="2133600" cy="266700"/>
+          <p:cNvPr id="27" name="stage-2-bullet-2-text"/>
+          <p:cNvSpPr>
+            <a:spLocks noGrp="1"/>
+          </p:cNvSpPr>
+          <p:nvPr/>
+        </p:nvSpPr>
+        <p:spPr>
+          <a:xfrm>
+            <a:off x="5205095" y="4157345"/>
+            <a:ext cx="2152015" cy="266700"/>
           </a:xfrm>
           <a:prstGeom prst="rect">
             <a:avLst/>
@@ -38176,13 +38502,13 @@
         </p:spPr>
         <p:txBody>
           <a:bodyPr anchor="t">
-            <a:noAutofit/>
+            <a:normAutofit fontScale="87638"/>
           </a:bodyPr>
           <a:lstStyle/>
           <a:p>
             <a:pPr algn="l">
               <a:buNone/>
-              <a:defRPr sz="1315" b="1">
+              <a:defRPr sz="1110" b="1">
                 <a:solidFill>
                   <a:srgbClr val="5B6472"/>
                 </a:solidFill>
@@ -38192,7 +38518,7 @@
               </a:defRPr>
             </a:pPr>
             <a:r>
-              <a:rPr sz="1100" b="1">
+              <a:rPr sz="1110" b="1">
                 <a:solidFill>
                   <a:srgbClr val="5B6472"/>
                 </a:solidFill>
@@ -38200,31 +38526,9 @@
                 <a:ea typeface="PingFang SC"/>
                 <a:cs typeface="PingFang SC"/>
               </a:rPr>
-              <a:t>AI</a:t>
-            </a:r>
-            <a:r>
-              <a:rPr sz="1100" b="1">
-                <a:solidFill>
-                  <a:srgbClr val="5B6472"/>
-                </a:solidFill>
-                <a:latin typeface="PingFang SC"/>
-                <a:ea typeface="PingFang SC"/>
-                <a:cs typeface="PingFang SC"/>
-              </a:rPr>
-              <a:t>原生</a:t>
-            </a:r>
-            <a:r>
-              <a:rPr sz="1100" b="1">
-                <a:solidFill>
-                  <a:srgbClr val="5B6472"/>
-                </a:solidFill>
-                <a:latin typeface="PingFang SC"/>
-                <a:ea typeface="PingFang SC"/>
-                <a:cs typeface="PingFang SC"/>
-              </a:rPr>
-              <a:t>开发模式</a:t>
-            </a:r>
-            <a:endParaRPr sz="1100" b="1">
+              <a:t>智慧继教 / 教师（/教学）档案袋</a:t>
+            </a:r>
+            <a:endParaRPr sz="1110" b="1">
               <a:solidFill>
                 <a:srgbClr val="5B6472"/>
               </a:solidFill>
@@ -38237,26 +38541,53 @@
       </p:sp>
       <p:sp>
         <p:nvSpPr>
-          <p:cNvPr id="21" name="reason-3-card"/>
-          <p:cNvSpPr>
-            <a:spLocks noGrp="1"/>
-          </p:cNvSpPr>
-          <p:nvPr/>
-        </p:nvSpPr>
-        <p:spPr>
-          <a:xfrm>
-            <a:off x="8096250" y="2190750"/>
-            <a:ext cx="3409950" cy="1466850"/>
+          <p:cNvPr id="28" name="arrow-2"/>
+          <p:cNvSpPr>
+            <a:spLocks noGrp="1"/>
+          </p:cNvSpPr>
+          <p:nvPr/>
+        </p:nvSpPr>
+        <p:spPr>
+          <a:xfrm>
+            <a:off x="7757795" y="3352800"/>
+            <a:ext cx="514350" cy="266700"/>
+          </a:xfrm>
+          <a:prstGeom prst="rightArrow">
+            <a:avLst/>
+          </a:prstGeom>
+          <a:solidFill>
+            <a:srgbClr val="B7BDC8"/>
+          </a:solidFill>
+          <a:ln w="0">
+            <a:solidFill>
+              <a:srgbClr val="B7BDC8"/>
+            </a:solidFill>
+            <a:prstDash val="solid"/>
+          </a:ln>
+        </p:spPr>
+      </p:sp>
+      <p:sp>
+        <p:nvSpPr>
+          <p:cNvPr id="29" name="stage-3-card"/>
+          <p:cNvSpPr>
+            <a:spLocks noGrp="1"/>
+          </p:cNvSpPr>
+          <p:nvPr/>
+        </p:nvSpPr>
+        <p:spPr>
+          <a:xfrm>
+            <a:off x="8305800" y="2381250"/>
+            <a:ext cx="3143250" cy="2266950"/>
           </a:xfrm>
           <a:prstGeom prst="roundRect">
             <a:avLst>
-              <a:gd name="adj" fmla="val 3896"/>
+              <a:gd name="adj" fmla="val 2521"/>
             </a:avLst>
           </a:prstGeom>
           <a:solidFill>
             <a:srgbClr val="F3F6FA"/>
           </a:solidFill>
-          <a:ln w="10954">
+          <a:ln w="10478">
             <a:solidFill>
               <a:srgbClr val="C9CED8"/>
             </a:solidFill>
@@ -38266,15 +38597,15 @@
       </p:sp>
       <p:sp>
         <p:nvSpPr>
-          <p:cNvPr id="22" name="reason-3-num-bg"/>
-          <p:cNvSpPr>
-            <a:spLocks noGrp="1"/>
-          </p:cNvSpPr>
-          <p:nvPr/>
-        </p:nvSpPr>
-        <p:spPr>
-          <a:xfrm>
-            <a:off x="8324850" y="2419350"/>
+          <p:cNvPr id="30" name="stage-3-badge"/>
+          <p:cNvSpPr>
+            <a:spLocks noGrp="1"/>
+          </p:cNvSpPr>
+          <p:nvPr/>
+        </p:nvSpPr>
+        <p:spPr>
+          <a:xfrm>
+            <a:off x="8553450" y="2647950"/>
             <a:ext cx="400050" cy="400050"/>
           </a:xfrm>
           <a:prstGeom prst="ellipse">
@@ -38293,16 +38624,16 @@
       </p:sp>
       <p:sp>
         <p:nvSpPr>
-          <p:cNvPr id="23" name="reason-3-num"/>
-          <p:cNvSpPr>
-            <a:spLocks noGrp="1"/>
-          </p:cNvSpPr>
-          <p:nvPr/>
-        </p:nvSpPr>
-        <p:spPr>
-          <a:xfrm>
-            <a:off x="8324850" y="2476500"/>
-            <a:ext cx="400050" cy="238125"/>
+          <p:cNvPr id="31" name="stage-3-badge-text"/>
+          <p:cNvSpPr>
+            <a:spLocks noGrp="1"/>
+          </p:cNvSpPr>
+          <p:nvPr/>
+        </p:nvSpPr>
+        <p:spPr>
+          <a:xfrm>
+            <a:off x="8553450" y="2705100"/>
+            <a:ext cx="400050" cy="247650"/>
           </a:xfrm>
           <a:prstGeom prst="rect">
             <a:avLst/>
@@ -38315,13 +38646,13 @@
         </p:spPr>
         <p:txBody>
           <a:bodyPr anchor="ctr">
-            <a:normAutofit fontScale="75490"/>
+            <a:normAutofit fontScale="85417"/>
           </a:bodyPr>
           <a:lstStyle/>
           <a:p>
             <a:pPr algn="ctr">
               <a:buNone/>
-              <a:defRPr sz="1275" b="1">
+              <a:defRPr sz="1200" b="1">
                 <a:solidFill>
                   <a:srgbClr val="FFFFFF"/>
                 </a:solidFill>
@@ -38331,7 +38662,7 @@
               </a:defRPr>
             </a:pPr>
             <a:r>
-              <a:rPr sz="1275" b="1">
+              <a:rPr sz="1200" b="1">
                 <a:solidFill>
                   <a:srgbClr val="FFFFFF"/>
                 </a:solidFill>
@@ -38341,7 +38672,7 @@
               </a:rPr>
               <a:t>03</a:t>
             </a:r>
-            <a:endParaRPr sz="1275" b="1">
+            <a:endParaRPr sz="1200" b="1">
               <a:solidFill>
                 <a:srgbClr val="FFFFFF"/>
               </a:solidFill>
@@ -38354,16 +38685,16 @@
       </p:sp>
       <p:sp>
         <p:nvSpPr>
-          <p:cNvPr id="24" name="reason-3-title"/>
-          <p:cNvSpPr>
-            <a:spLocks noGrp="1"/>
-          </p:cNvSpPr>
-          <p:nvPr/>
-        </p:nvSpPr>
-        <p:spPr>
-          <a:xfrm>
-            <a:off x="8877300" y="2390775"/>
-            <a:ext cx="2400300" cy="419100"/>
+          <p:cNvPr id="32" name="stage-3-title"/>
+          <p:cNvSpPr>
+            <a:spLocks noGrp="1"/>
+          </p:cNvSpPr>
+          <p:nvPr/>
+        </p:nvSpPr>
+        <p:spPr>
+          <a:xfrm>
+            <a:off x="9105900" y="2628900"/>
+            <a:ext cx="2038350" cy="304800"/>
           </a:xfrm>
           <a:prstGeom prst="rect">
             <a:avLst/>
@@ -38376,7 +38707,7 @@
         </p:spPr>
         <p:txBody>
           <a:bodyPr anchor="ctr">
-            <a:normAutofit/>
+            <a:normAutofit fontScale="81159"/>
           </a:bodyPr>
           <a:lstStyle/>
           <a:p>
@@ -38400,18 +38731,7 @@
                 <a:ea typeface="PingFang SC"/>
                 <a:cs typeface="PingFang SC"/>
               </a:rPr>
-              <a:t>灵活、</a:t>
-            </a:r>
-            <a:r>
-              <a:rPr sz="1725" b="1">
-                <a:solidFill>
-                  <a:srgbClr val="000000"/>
-                </a:solidFill>
-                <a:latin typeface="PingFang SC"/>
-                <a:ea typeface="PingFang SC"/>
-                <a:cs typeface="PingFang SC"/>
-              </a:rPr>
-              <a:t>场景广泛</a:t>
+              <a:t>快速迭代</a:t>
             </a:r>
             <a:endParaRPr sz="1725" b="1">
               <a:solidFill>
@@ -38426,18 +38746,79 @@
       </p:sp>
       <p:sp>
         <p:nvSpPr>
-          <p:cNvPr id="25" name="reason-3-bullet-0"/>
-          <p:cNvSpPr>
-            <a:spLocks noGrp="1"/>
-          </p:cNvSpPr>
-          <p:nvPr/>
-        </p:nvSpPr>
-        <p:spPr>
-          <a:xfrm>
-            <a:off x="8896350" y="3009900"/>
-            <a:ext cx="76200" cy="76200"/>
-          </a:xfrm>
-          <a:prstGeom prst="ellipse">
+          <p:cNvPr id="33" name="stage-3-subtitle"/>
+          <p:cNvSpPr>
+            <a:spLocks noGrp="1"/>
+          </p:cNvSpPr>
+          <p:nvPr/>
+        </p:nvSpPr>
+        <p:spPr>
+          <a:xfrm>
+            <a:off x="9105900" y="2990850"/>
+            <a:ext cx="2038350" cy="381000"/>
+          </a:xfrm>
+          <a:prstGeom prst="rect">
+            <a:avLst/>
+          </a:prstGeom>
+          <a:noFill/>
+          <a:ln w="0">
+            <a:noFill/>
+            <a:prstDash val="solid"/>
+          </a:ln>
+        </p:spPr>
+        <p:txBody>
+          <a:bodyPr anchor="t">
+            <a:normAutofit fontScale="87907"/>
+          </a:bodyPr>
+          <a:lstStyle/>
+          <a:p>
+            <a:pPr algn="l">
+              <a:buNone/>
+              <a:defRPr sz="1165" b="1">
+                <a:solidFill>
+                  <a:srgbClr val="5B6472"/>
+                </a:solidFill>
+                <a:latin typeface="PingFang SC"/>
+                <a:ea typeface="PingFang SC"/>
+                <a:cs typeface="PingFang SC"/>
+              </a:defRPr>
+            </a:pPr>
+            <a:r>
+              <a:rPr sz="1165" b="1">
+                <a:solidFill>
+                  <a:srgbClr val="5B6472"/>
+                </a:solidFill>
+                <a:latin typeface="PingFang SC"/>
+                <a:ea typeface="PingFang SC"/>
+                <a:cs typeface="PingFang SC"/>
+              </a:rPr>
+              <a:t>上线试错、验证反馈、持续优化</a:t>
+            </a:r>
+            <a:endParaRPr sz="1165" b="1">
+              <a:solidFill>
+                <a:srgbClr val="5B6472"/>
+              </a:solidFill>
+              <a:latin typeface="PingFang SC"/>
+              <a:ea typeface="PingFang SC"/>
+              <a:cs typeface="PingFang SC"/>
+            </a:endParaRPr>
+          </a:p>
+        </p:txBody>
+      </p:sp>
+      <p:sp>
+        <p:nvSpPr>
+          <p:cNvPr id="34" name="stage-3-bullet-0-dot"/>
+          <p:cNvSpPr>
+            <a:spLocks noGrp="1"/>
+          </p:cNvSpPr>
+          <p:nvPr/>
+        </p:nvSpPr>
+        <p:spPr>
+          <a:xfrm>
+            <a:off x="9034145" y="3514090"/>
+            <a:ext cx="57150" cy="57150"/>
+          </a:xfrm>
+          <a:prstGeom prst="rect">
             <a:avLst/>
           </a:prstGeom>
           <a:solidFill>
@@ -38453,16 +38834,16 @@
       </p:sp>
       <p:sp>
         <p:nvSpPr>
-          <p:cNvPr id="26" name="reason-3-bullet-0-text"/>
-          <p:cNvSpPr>
-            <a:spLocks noGrp="1"/>
-          </p:cNvSpPr>
-          <p:nvPr/>
-        </p:nvSpPr>
-        <p:spPr>
-          <a:xfrm>
-            <a:off x="9105900" y="2914650"/>
-            <a:ext cx="2133600" cy="266700"/>
+          <p:cNvPr id="35" name="stage-3-bullet-0-text"/>
+          <p:cNvSpPr>
+            <a:spLocks noGrp="1"/>
+          </p:cNvSpPr>
+          <p:nvPr/>
+        </p:nvSpPr>
+        <p:spPr>
+          <a:xfrm>
+            <a:off x="9119235" y="3399790"/>
+            <a:ext cx="2162810" cy="266700"/>
           </a:xfrm>
           <a:prstGeom prst="rect">
             <a:avLst/>
@@ -38475,13 +38856,13 @@
         </p:spPr>
         <p:txBody>
           <a:bodyPr anchor="t">
-            <a:normAutofit fontScale="85185"/>
+            <a:normAutofit fontScale="98882" lnSpcReduction="10000"/>
           </a:bodyPr>
           <a:lstStyle/>
           <a:p>
             <a:pPr algn="l">
               <a:buNone/>
-              <a:defRPr sz="1350" b="1">
+              <a:defRPr sz="1165" b="1">
                 <a:solidFill>
                   <a:srgbClr val="5B6472"/>
                 </a:solidFill>
@@ -38491,7 +38872,7 @@
               </a:defRPr>
             </a:pPr>
             <a:r>
-              <a:rPr sz="1350" b="1">
+              <a:rPr sz="1165" b="1">
                 <a:solidFill>
                   <a:srgbClr val="5B6472"/>
                 </a:solidFill>
@@ -38499,9 +38880,9 @@
                 <a:ea typeface="PingFang SC"/>
                 <a:cs typeface="PingFang SC"/>
               </a:rPr>
-              <a:t>场景自由装配：研训一体化</a:t>
-            </a:r>
-            <a:endParaRPr sz="1350" b="1">
+              <a:t>小步快跑验证</a:t>
+            </a:r>
+            <a:endParaRPr sz="1165" b="1">
               <a:solidFill>
                 <a:srgbClr val="5B6472"/>
               </a:solidFill>
@@ -38514,26 +38895,202 @@
       </p:sp>
       <p:sp>
         <p:nvSpPr>
-          <p:cNvPr id="27" name="reason-4-card"/>
-          <p:cNvSpPr>
-            <a:spLocks noGrp="1"/>
-          </p:cNvSpPr>
-          <p:nvPr/>
-        </p:nvSpPr>
-        <p:spPr>
-          <a:xfrm>
-            <a:off x="1752600" y="4400550"/>
-            <a:ext cx="3733800" cy="1466850"/>
+          <p:cNvPr id="36" name="stage-3-bullet-1-dot"/>
+          <p:cNvSpPr>
+            <a:spLocks noGrp="1"/>
+          </p:cNvSpPr>
+          <p:nvPr/>
+        </p:nvSpPr>
+        <p:spPr>
+          <a:xfrm>
+            <a:off x="9034145" y="3856990"/>
+            <a:ext cx="57150" cy="57150"/>
+          </a:xfrm>
+          <a:prstGeom prst="rect">
+            <a:avLst/>
+          </a:prstGeom>
+          <a:solidFill>
+            <a:srgbClr val="2F83FF"/>
+          </a:solidFill>
+          <a:ln w="0">
+            <a:solidFill>
+              <a:srgbClr val="2F83FF"/>
+            </a:solidFill>
+            <a:prstDash val="solid"/>
+          </a:ln>
+        </p:spPr>
+      </p:sp>
+      <p:sp>
+        <p:nvSpPr>
+          <p:cNvPr id="37" name="stage-3-bullet-1-text"/>
+          <p:cNvSpPr>
+            <a:spLocks noGrp="1"/>
+          </p:cNvSpPr>
+          <p:nvPr/>
+        </p:nvSpPr>
+        <p:spPr>
+          <a:xfrm>
+            <a:off x="9145270" y="3742690"/>
+            <a:ext cx="2136775" cy="266700"/>
+          </a:xfrm>
+          <a:prstGeom prst="rect">
+            <a:avLst/>
+          </a:prstGeom>
+          <a:noFill/>
+          <a:ln w="0">
+            <a:noFill/>
+            <a:prstDash val="solid"/>
+          </a:ln>
+        </p:spPr>
+        <p:txBody>
+          <a:bodyPr anchor="t">
+            <a:normAutofit fontScale="98882" lnSpcReduction="10000"/>
+          </a:bodyPr>
+          <a:lstStyle/>
+          <a:p>
+            <a:pPr algn="l">
+              <a:buNone/>
+              <a:defRPr sz="1165" b="1">
+                <a:solidFill>
+                  <a:srgbClr val="5B6472"/>
+                </a:solidFill>
+                <a:latin typeface="PingFang SC"/>
+                <a:ea typeface="PingFang SC"/>
+                <a:cs typeface="PingFang SC"/>
+              </a:defRPr>
+            </a:pPr>
+            <a:r>
+              <a:rPr sz="1165" b="1">
+                <a:solidFill>
+                  <a:srgbClr val="5B6472"/>
+                </a:solidFill>
+                <a:latin typeface="PingFang SC"/>
+                <a:ea typeface="PingFang SC"/>
+                <a:cs typeface="PingFang SC"/>
+              </a:rPr>
+              <a:t>成功能力复用</a:t>
+            </a:r>
+            <a:endParaRPr sz="1165" b="1">
+              <a:solidFill>
+                <a:srgbClr val="5B6472"/>
+              </a:solidFill>
+              <a:latin typeface="PingFang SC"/>
+              <a:ea typeface="PingFang SC"/>
+              <a:cs typeface="PingFang SC"/>
+            </a:endParaRPr>
+          </a:p>
+        </p:txBody>
+      </p:sp>
+      <p:sp>
+        <p:nvSpPr>
+          <p:cNvPr id="38" name="stage-3-bullet-2-dot"/>
+          <p:cNvSpPr>
+            <a:spLocks noGrp="1"/>
+          </p:cNvSpPr>
+          <p:nvPr/>
+        </p:nvSpPr>
+        <p:spPr>
+          <a:xfrm>
+            <a:off x="9034145" y="4199890"/>
+            <a:ext cx="57150" cy="57150"/>
+          </a:xfrm>
+          <a:prstGeom prst="rect">
+            <a:avLst/>
+          </a:prstGeom>
+          <a:solidFill>
+            <a:srgbClr val="2F83FF"/>
+          </a:solidFill>
+          <a:ln w="0">
+            <a:solidFill>
+              <a:srgbClr val="2F83FF"/>
+            </a:solidFill>
+            <a:prstDash val="solid"/>
+          </a:ln>
+        </p:spPr>
+      </p:sp>
+      <p:sp>
+        <p:nvSpPr>
+          <p:cNvPr id="39" name="stage-3-bullet-2-text"/>
+          <p:cNvSpPr>
+            <a:spLocks noGrp="1"/>
+          </p:cNvSpPr>
+          <p:nvPr/>
+        </p:nvSpPr>
+        <p:spPr>
+          <a:xfrm>
+            <a:off x="9145270" y="4085590"/>
+            <a:ext cx="2136775" cy="266700"/>
+          </a:xfrm>
+          <a:prstGeom prst="rect">
+            <a:avLst/>
+          </a:prstGeom>
+          <a:noFill/>
+          <a:ln w="0">
+            <a:noFill/>
+            <a:prstDash val="solid"/>
+          </a:ln>
+        </p:spPr>
+        <p:txBody>
+          <a:bodyPr anchor="t">
+            <a:normAutofit fontScale="98882" lnSpcReduction="10000"/>
+          </a:bodyPr>
+          <a:lstStyle/>
+          <a:p>
+            <a:pPr algn="l">
+              <a:buNone/>
+              <a:defRPr sz="1165" b="1">
+                <a:solidFill>
+                  <a:srgbClr val="5B6472"/>
+                </a:solidFill>
+                <a:latin typeface="PingFang SC"/>
+                <a:ea typeface="PingFang SC"/>
+                <a:cs typeface="PingFang SC"/>
+              </a:defRPr>
+            </a:pPr>
+            <a:r>
+              <a:rPr sz="1165" b="1">
+                <a:solidFill>
+                  <a:srgbClr val="5B6472"/>
+                </a:solidFill>
+                <a:latin typeface="PingFang SC"/>
+                <a:ea typeface="PingFang SC"/>
+                <a:cs typeface="PingFang SC"/>
+              </a:rPr>
+              <a:t>产品形态持续扩展</a:t>
+            </a:r>
+            <a:endParaRPr sz="1165" b="1">
+              <a:solidFill>
+                <a:srgbClr val="5B6472"/>
+              </a:solidFill>
+              <a:latin typeface="PingFang SC"/>
+              <a:ea typeface="PingFang SC"/>
+              <a:cs typeface="PingFang SC"/>
+            </a:endParaRPr>
+          </a:p>
+        </p:txBody>
+      </p:sp>
+      <p:sp>
+        <p:nvSpPr>
+          <p:cNvPr id="40" name="insight-band"/>
+          <p:cNvSpPr>
+            <a:spLocks noGrp="1"/>
+          </p:cNvSpPr>
+          <p:nvPr/>
+        </p:nvSpPr>
+        <p:spPr>
+          <a:xfrm>
+            <a:off x="742950" y="5029200"/>
+            <a:ext cx="10706100" cy="838200"/>
           </a:xfrm>
           <a:prstGeom prst="roundRect">
             <a:avLst>
-              <a:gd name="adj" fmla="val 3896"/>
+              <a:gd name="adj" fmla="val 6818"/>
             </a:avLst>
           </a:prstGeom>
           <a:solidFill>
             <a:srgbClr val="F7F9FC"/>
           </a:solidFill>
-          <a:ln w="10954">
+          <a:ln w="10478">
             <a:solidFill>
               <a:srgbClr val="C9CED8"/>
             </a:solidFill>
@@ -38543,43 +39100,16 @@
       </p:sp>
       <p:sp>
         <p:nvSpPr>
-          <p:cNvPr id="28" name="reason-4-num-bg"/>
-          <p:cNvSpPr>
-            <a:spLocks noGrp="1"/>
-          </p:cNvSpPr>
-          <p:nvPr/>
-        </p:nvSpPr>
-        <p:spPr>
-          <a:xfrm>
-            <a:off x="1981200" y="4629150"/>
-            <a:ext cx="400050" cy="400050"/>
-          </a:xfrm>
-          <a:prstGeom prst="ellipse">
-            <a:avLst/>
-          </a:prstGeom>
-          <a:solidFill>
-            <a:srgbClr val="000000"/>
-          </a:solidFill>
-          <a:ln w="0">
-            <a:solidFill>
-              <a:srgbClr val="000000"/>
-            </a:solidFill>
-            <a:prstDash val="solid"/>
-          </a:ln>
-        </p:spPr>
-      </p:sp>
-      <p:sp>
-        <p:nvSpPr>
-          <p:cNvPr id="29" name="reason-4-num"/>
-          <p:cNvSpPr>
-            <a:spLocks noGrp="1"/>
-          </p:cNvSpPr>
-          <p:nvPr/>
-        </p:nvSpPr>
-        <p:spPr>
-          <a:xfrm>
-            <a:off x="1981200" y="4686300"/>
-            <a:ext cx="400050" cy="238125"/>
+          <p:cNvPr id="41" name="insight-title"/>
+          <p:cNvSpPr>
+            <a:spLocks noGrp="1"/>
+          </p:cNvSpPr>
+          <p:nvPr/>
+        </p:nvSpPr>
+        <p:spPr>
+          <a:xfrm>
+            <a:off x="1047750" y="5181600"/>
+            <a:ext cx="4953000" cy="285750"/>
           </a:xfrm>
           <a:prstGeom prst="rect">
             <a:avLst/>
@@ -38592,35 +39122,35 @@
         </p:spPr>
         <p:txBody>
           <a:bodyPr anchor="ctr">
-            <a:normAutofit fontScale="75490"/>
-          </a:bodyPr>
-          <a:lstStyle/>
-          <a:p>
-            <a:pPr algn="ctr">
-              <a:buNone/>
-              <a:defRPr sz="1275" b="1">
-                <a:solidFill>
-                  <a:srgbClr val="FFFFFF"/>
-                </a:solidFill>
-                <a:latin typeface="PingFang SC"/>
-                <a:ea typeface="PingFang SC"/>
-                <a:cs typeface="PingFang SC"/>
-              </a:defRPr>
-            </a:pPr>
-            <a:r>
-              <a:rPr sz="1275" b="1">
-                <a:solidFill>
-                  <a:srgbClr val="FFFFFF"/>
-                </a:solidFill>
-                <a:latin typeface="PingFang SC"/>
-                <a:ea typeface="PingFang SC"/>
-                <a:cs typeface="PingFang SC"/>
-              </a:rPr>
-              <a:t>04</a:t>
-            </a:r>
-            <a:endParaRPr sz="1275" b="1">
-              <a:solidFill>
-                <a:srgbClr val="FFFFFF"/>
+            <a:normAutofit fontScale="77273"/>
+          </a:bodyPr>
+          <a:lstStyle/>
+          <a:p>
+            <a:pPr algn="l">
+              <a:buNone/>
+              <a:defRPr sz="1650" b="1">
+                <a:solidFill>
+                  <a:srgbClr val="000000"/>
+                </a:solidFill>
+                <a:latin typeface="PingFang SC"/>
+                <a:ea typeface="PingFang SC"/>
+                <a:cs typeface="PingFang SC"/>
+              </a:defRPr>
+            </a:pPr>
+            <a:r>
+              <a:rPr sz="1650" b="1">
+                <a:solidFill>
+                  <a:srgbClr val="000000"/>
+                </a:solidFill>
+                <a:latin typeface="PingFang SC"/>
+                <a:ea typeface="PingFang SC"/>
+                <a:cs typeface="PingFang SC"/>
+              </a:rPr>
+              <a:t>透过现象看本质：外部包装不同，底层根基相同</a:t>
+            </a:r>
+            <a:endParaRPr sz="1650" b="1">
+              <a:solidFill>
+                <a:srgbClr val="000000"/>
               </a:solidFill>
               <a:latin typeface="PingFang SC"/>
               <a:ea typeface="PingFang SC"/>
@@ -38631,16 +39161,16 @@
       </p:sp>
       <p:sp>
         <p:nvSpPr>
-          <p:cNvPr id="30" name="reason-4-title"/>
-          <p:cNvSpPr>
-            <a:spLocks noGrp="1"/>
-          </p:cNvSpPr>
-          <p:nvPr/>
-        </p:nvSpPr>
-        <p:spPr>
-          <a:xfrm>
-            <a:off x="2533650" y="4600575"/>
-            <a:ext cx="2724150" cy="419100"/>
+          <p:cNvPr id="42" name="insight-body"/>
+          <p:cNvSpPr>
+            <a:spLocks noGrp="1"/>
+          </p:cNvSpPr>
+          <p:nvPr/>
+        </p:nvSpPr>
+        <p:spPr>
+          <a:xfrm>
+            <a:off x="1047750" y="5505450"/>
+            <a:ext cx="9620250" cy="247650"/>
           </a:xfrm>
           <a:prstGeom prst="rect">
             <a:avLst/>
@@ -38653,35 +39183,35 @@
         </p:spPr>
         <p:txBody>
           <a:bodyPr anchor="ctr">
-            <a:normAutofit/>
+            <a:normAutofit fontScale="80392"/>
           </a:bodyPr>
           <a:lstStyle/>
           <a:p>
             <a:pPr algn="l">
               <a:buNone/>
-              <a:defRPr sz="1725" b="1">
-                <a:solidFill>
-                  <a:srgbClr val="000000"/>
-                </a:solidFill>
-                <a:latin typeface="PingFang SC"/>
-                <a:ea typeface="PingFang SC"/>
-                <a:cs typeface="PingFang SC"/>
-              </a:defRPr>
-            </a:pPr>
-            <a:r>
-              <a:rPr sz="1725" b="1">
-                <a:solidFill>
-                  <a:srgbClr val="000000"/>
-                </a:solidFill>
-                <a:latin typeface="PingFang SC"/>
-                <a:ea typeface="PingFang SC"/>
-                <a:cs typeface="PingFang SC"/>
-              </a:rPr>
-              <a:t>部署轻量</a:t>
-            </a:r>
-            <a:endParaRPr sz="1725" b="1">
-              <a:solidFill>
-                <a:srgbClr val="000000"/>
+              <a:defRPr sz="1275" b="1">
+                <a:solidFill>
+                  <a:srgbClr val="5B6472"/>
+                </a:solidFill>
+                <a:latin typeface="PingFang SC"/>
+                <a:ea typeface="PingFang SC"/>
+                <a:cs typeface="PingFang SC"/>
+              </a:defRPr>
+            </a:pPr>
+            <a:r>
+              <a:rPr sz="1275" b="1">
+                <a:solidFill>
+                  <a:srgbClr val="5B6472"/>
+                </a:solidFill>
+                <a:latin typeface="PingFang SC"/>
+                <a:ea typeface="PingFang SC"/>
+                <a:cs typeface="PingFang SC"/>
+              </a:rPr>
+              <a:t>各种产品形态层出不穷，看起来是不同领域的解决方案，本质上都在复用自己的底层技术架构、能力组件、数据资产和开发方法。</a:t>
+            </a:r>
+            <a:endParaRPr sz="1275" b="1">
+              <a:solidFill>
+                <a:srgbClr val="5B6472"/>
               </a:solidFill>
               <a:latin typeface="PingFang SC"/>
               <a:ea typeface="PingFang SC"/>
@@ -38692,374 +39222,20 @@
       </p:sp>
       <p:sp>
         <p:nvSpPr>
-          <p:cNvPr id="31" name="reason-4-bullet-0"/>
-          <p:cNvSpPr>
-            <a:spLocks noGrp="1"/>
-          </p:cNvSpPr>
-          <p:nvPr/>
-        </p:nvSpPr>
-        <p:spPr>
-          <a:xfrm>
-            <a:off x="2552700" y="5219700"/>
-            <a:ext cx="76200" cy="76200"/>
-          </a:xfrm>
-          <a:prstGeom prst="ellipse">
-            <a:avLst/>
-          </a:prstGeom>
-          <a:solidFill>
-            <a:srgbClr val="2F83FF"/>
-          </a:solidFill>
-          <a:ln w="0">
-            <a:solidFill>
-              <a:srgbClr val="2F83FF"/>
-            </a:solidFill>
-            <a:prstDash val="solid"/>
-          </a:ln>
-        </p:spPr>
-      </p:sp>
-      <p:sp>
-        <p:nvSpPr>
-          <p:cNvPr id="32" name="reason-4-bullet-0-text"/>
-          <p:cNvSpPr>
-            <a:spLocks noGrp="1"/>
-          </p:cNvSpPr>
-          <p:nvPr/>
-        </p:nvSpPr>
-        <p:spPr>
-          <a:xfrm>
-            <a:off x="2762250" y="5124450"/>
-            <a:ext cx="2457450" cy="266700"/>
-          </a:xfrm>
-          <a:prstGeom prst="rect">
-            <a:avLst/>
-          </a:prstGeom>
-          <a:noFill/>
-          <a:ln w="0">
-            <a:noFill/>
-            <a:prstDash val="solid"/>
-          </a:ln>
-        </p:spPr>
-        <p:txBody>
-          <a:bodyPr anchor="t">
-            <a:normAutofit fontScale="85185"/>
-          </a:bodyPr>
-          <a:lstStyle/>
-          <a:p>
-            <a:pPr algn="l">
-              <a:buNone/>
-              <a:defRPr sz="1350" b="1">
-                <a:solidFill>
-                  <a:srgbClr val="5B6472"/>
-                </a:solidFill>
-                <a:latin typeface="PingFang SC"/>
-                <a:ea typeface="PingFang SC"/>
-                <a:cs typeface="PingFang SC"/>
-              </a:defRPr>
-            </a:pPr>
-            <a:r>
-              <a:rPr sz="1350" b="1">
-                <a:solidFill>
-                  <a:srgbClr val="5B6472"/>
-                </a:solidFill>
-                <a:latin typeface="PingFang SC"/>
-                <a:ea typeface="PingFang SC"/>
-                <a:cs typeface="PingFang SC"/>
-              </a:rPr>
-              <a:t>部署效率高、部署成本低</a:t>
-            </a:r>
-            <a:endParaRPr sz="1350" b="1">
-              <a:solidFill>
-                <a:srgbClr val="5B6472"/>
-              </a:solidFill>
-              <a:latin typeface="PingFang SC"/>
-              <a:ea typeface="PingFang SC"/>
-              <a:cs typeface="PingFang SC"/>
-            </a:endParaRPr>
-          </a:p>
-        </p:txBody>
-      </p:sp>
-      <p:sp>
-        <p:nvSpPr>
-          <p:cNvPr id="33" name="reason-5-card"/>
-          <p:cNvSpPr>
-            <a:spLocks noGrp="1"/>
-          </p:cNvSpPr>
-          <p:nvPr/>
-        </p:nvSpPr>
-        <p:spPr>
-          <a:xfrm>
-            <a:off x="6705600" y="4400550"/>
-            <a:ext cx="3733800" cy="1466850"/>
+          <p:cNvPr id="43" name="bottom-judgement"/>
+          <p:cNvSpPr>
+            <a:spLocks noGrp="1"/>
+          </p:cNvSpPr>
+          <p:nvPr/>
+        </p:nvSpPr>
+        <p:spPr>
+          <a:xfrm>
+            <a:off x="1619250" y="6057900"/>
+            <a:ext cx="8953500" cy="381000"/>
           </a:xfrm>
           <a:prstGeom prst="roundRect">
             <a:avLst>
-              <a:gd name="adj" fmla="val 3896"/>
-            </a:avLst>
-          </a:prstGeom>
-          <a:solidFill>
-            <a:srgbClr val="F7F9FC"/>
-          </a:solidFill>
-          <a:ln w="10954">
-            <a:solidFill>
-              <a:srgbClr val="C9CED8"/>
-            </a:solidFill>
-            <a:prstDash val="solid"/>
-          </a:ln>
-        </p:spPr>
-      </p:sp>
-      <p:sp>
-        <p:nvSpPr>
-          <p:cNvPr id="34" name="reason-5-num-bg"/>
-          <p:cNvSpPr>
-            <a:spLocks noGrp="1"/>
-          </p:cNvSpPr>
-          <p:nvPr/>
-        </p:nvSpPr>
-        <p:spPr>
-          <a:xfrm>
-            <a:off x="6934200" y="4629150"/>
-            <a:ext cx="400050" cy="400050"/>
-          </a:xfrm>
-          <a:prstGeom prst="ellipse">
-            <a:avLst/>
-          </a:prstGeom>
-          <a:solidFill>
-            <a:srgbClr val="2F83FF"/>
-          </a:solidFill>
-          <a:ln w="0">
-            <a:solidFill>
-              <a:srgbClr val="2F83FF"/>
-            </a:solidFill>
-            <a:prstDash val="solid"/>
-          </a:ln>
-        </p:spPr>
-      </p:sp>
-      <p:sp>
-        <p:nvSpPr>
-          <p:cNvPr id="35" name="reason-5-num"/>
-          <p:cNvSpPr>
-            <a:spLocks noGrp="1"/>
-          </p:cNvSpPr>
-          <p:nvPr/>
-        </p:nvSpPr>
-        <p:spPr>
-          <a:xfrm>
-            <a:off x="6934200" y="4686300"/>
-            <a:ext cx="400050" cy="238125"/>
-          </a:xfrm>
-          <a:prstGeom prst="rect">
-            <a:avLst/>
-          </a:prstGeom>
-          <a:noFill/>
-          <a:ln w="0">
-            <a:noFill/>
-            <a:prstDash val="solid"/>
-          </a:ln>
-        </p:spPr>
-        <p:txBody>
-          <a:bodyPr anchor="ctr">
-            <a:normAutofit fontScale="75490"/>
-          </a:bodyPr>
-          <a:lstStyle/>
-          <a:p>
-            <a:pPr algn="ctr">
-              <a:buNone/>
-              <a:defRPr sz="1275" b="1">
-                <a:solidFill>
-                  <a:srgbClr val="FFFFFF"/>
-                </a:solidFill>
-                <a:latin typeface="PingFang SC"/>
-                <a:ea typeface="PingFang SC"/>
-                <a:cs typeface="PingFang SC"/>
-              </a:defRPr>
-            </a:pPr>
-            <a:r>
-              <a:rPr sz="1275" b="1">
-                <a:solidFill>
-                  <a:srgbClr val="FFFFFF"/>
-                </a:solidFill>
-                <a:latin typeface="PingFang SC"/>
-                <a:ea typeface="PingFang SC"/>
-                <a:cs typeface="PingFang SC"/>
-              </a:rPr>
-              <a:t>05</a:t>
-            </a:r>
-            <a:endParaRPr sz="1275" b="1">
-              <a:solidFill>
-                <a:srgbClr val="FFFFFF"/>
-              </a:solidFill>
-              <a:latin typeface="PingFang SC"/>
-              <a:ea typeface="PingFang SC"/>
-              <a:cs typeface="PingFang SC"/>
-            </a:endParaRPr>
-          </a:p>
-        </p:txBody>
-      </p:sp>
-      <p:sp>
-        <p:nvSpPr>
-          <p:cNvPr id="36" name="reason-5-title"/>
-          <p:cNvSpPr>
-            <a:spLocks noGrp="1"/>
-          </p:cNvSpPr>
-          <p:nvPr/>
-        </p:nvSpPr>
-        <p:spPr>
-          <a:xfrm>
-            <a:off x="7486650" y="4600575"/>
-            <a:ext cx="2724150" cy="419100"/>
-          </a:xfrm>
-          <a:prstGeom prst="rect">
-            <a:avLst/>
-          </a:prstGeom>
-          <a:noFill/>
-          <a:ln w="0">
-            <a:noFill/>
-            <a:prstDash val="solid"/>
-          </a:ln>
-        </p:spPr>
-        <p:txBody>
-          <a:bodyPr anchor="ctr">
-            <a:normAutofit fontScale="97545"/>
-          </a:bodyPr>
-          <a:lstStyle/>
-          <a:p>
-            <a:pPr algn="l">
-              <a:buNone/>
-              <a:defRPr sz="1575" b="1">
-                <a:solidFill>
-                  <a:srgbClr val="000000"/>
-                </a:solidFill>
-                <a:latin typeface="PingFang SC"/>
-                <a:ea typeface="PingFang SC"/>
-                <a:cs typeface="PingFang SC"/>
-              </a:defRPr>
-            </a:pPr>
-            <a:r>
-              <a:rPr sz="1575" b="1">
-                <a:solidFill>
-                  <a:srgbClr val="000000"/>
-                </a:solidFill>
-                <a:latin typeface="PingFang SC"/>
-                <a:ea typeface="PingFang SC"/>
-                <a:cs typeface="PingFang SC"/>
-              </a:rPr>
-              <a:t>支持 Token 商业模式的落地</a:t>
-            </a:r>
-            <a:endParaRPr sz="1575" b="1">
-              <a:solidFill>
-                <a:srgbClr val="000000"/>
-              </a:solidFill>
-              <a:latin typeface="PingFang SC"/>
-              <a:ea typeface="PingFang SC"/>
-              <a:cs typeface="PingFang SC"/>
-            </a:endParaRPr>
-          </a:p>
-        </p:txBody>
-      </p:sp>
-      <p:sp>
-        <p:nvSpPr>
-          <p:cNvPr id="37" name="reason-5-bullet-0"/>
-          <p:cNvSpPr>
-            <a:spLocks noGrp="1"/>
-          </p:cNvSpPr>
-          <p:nvPr/>
-        </p:nvSpPr>
-        <p:spPr>
-          <a:xfrm>
-            <a:off x="7505700" y="5219700"/>
-            <a:ext cx="76200" cy="76200"/>
-          </a:xfrm>
-          <a:prstGeom prst="ellipse">
-            <a:avLst/>
-          </a:prstGeom>
-          <a:solidFill>
-            <a:srgbClr val="2F83FF"/>
-          </a:solidFill>
-          <a:ln w="0">
-            <a:solidFill>
-              <a:srgbClr val="2F83FF"/>
-            </a:solidFill>
-            <a:prstDash val="solid"/>
-          </a:ln>
-        </p:spPr>
-      </p:sp>
-      <p:sp>
-        <p:nvSpPr>
-          <p:cNvPr id="38" name="reason-5-bullet-0-text"/>
-          <p:cNvSpPr>
-            <a:spLocks noGrp="1"/>
-          </p:cNvSpPr>
-          <p:nvPr/>
-        </p:nvSpPr>
-        <p:spPr>
-          <a:xfrm>
-            <a:off x="7715250" y="5124450"/>
-            <a:ext cx="2457450" cy="266700"/>
-          </a:xfrm>
-          <a:prstGeom prst="rect">
-            <a:avLst/>
-          </a:prstGeom>
-          <a:noFill/>
-          <a:ln w="0">
-            <a:noFill/>
-            <a:prstDash val="solid"/>
-          </a:ln>
-        </p:spPr>
-        <p:txBody>
-          <a:bodyPr anchor="t">
-            <a:normAutofit fontScale="85185"/>
-          </a:bodyPr>
-          <a:lstStyle/>
-          <a:p>
-            <a:pPr algn="l">
-              <a:buNone/>
-              <a:defRPr sz="1350" b="1">
-                <a:solidFill>
-                  <a:srgbClr val="5B6472"/>
-                </a:solidFill>
-                <a:latin typeface="PingFang SC"/>
-                <a:ea typeface="PingFang SC"/>
-                <a:cs typeface="PingFang SC"/>
-              </a:defRPr>
-            </a:pPr>
-            <a:r>
-              <a:rPr sz="1350" b="1">
-                <a:solidFill>
-                  <a:srgbClr val="5B6472"/>
-                </a:solidFill>
-                <a:latin typeface="PingFang SC"/>
-                <a:ea typeface="PingFang SC"/>
-                <a:cs typeface="PingFang SC"/>
-              </a:rPr>
-              <a:t>大模型治理</a:t>
-            </a:r>
-            <a:endParaRPr sz="1350" b="1">
-              <a:solidFill>
-                <a:srgbClr val="5B6472"/>
-              </a:solidFill>
-              <a:latin typeface="PingFang SC"/>
-              <a:ea typeface="PingFang SC"/>
-              <a:cs typeface="PingFang SC"/>
-            </a:endParaRPr>
-          </a:p>
-        </p:txBody>
-      </p:sp>
-      <p:sp>
-        <p:nvSpPr>
-          <p:cNvPr id="39" name="judgement-band"/>
-          <p:cNvSpPr>
-            <a:spLocks noGrp="1"/>
-          </p:cNvSpPr>
-          <p:nvPr/>
-        </p:nvSpPr>
-        <p:spPr>
-          <a:xfrm>
-            <a:off x="1219200" y="6076950"/>
-            <a:ext cx="9753600" cy="400050"/>
-          </a:xfrm>
-          <a:prstGeom prst="roundRect">
-            <a:avLst>
-              <a:gd name="adj" fmla="val 14286"/>
+              <a:gd name="adj" fmla="val 15000"/>
             </a:avLst>
           </a:prstGeom>
           <a:solidFill>
@@ -39075,16 +39251,16 @@
       </p:sp>
       <p:sp>
         <p:nvSpPr>
-          <p:cNvPr id="40" name="judgement-text"/>
-          <p:cNvSpPr>
-            <a:spLocks noGrp="1"/>
-          </p:cNvSpPr>
-          <p:nvPr/>
-        </p:nvSpPr>
-        <p:spPr>
-          <a:xfrm>
-            <a:off x="1466850" y="6153150"/>
-            <a:ext cx="9258300" cy="247650"/>
+          <p:cNvPr id="44" name="bottom-judgement-text"/>
+          <p:cNvSpPr>
+            <a:spLocks noGrp="1"/>
+          </p:cNvSpPr>
+          <p:nvPr/>
+        </p:nvSpPr>
+        <p:spPr>
+          <a:xfrm>
+            <a:off x="1866900" y="6134100"/>
+            <a:ext cx="8458200" cy="228600"/>
           </a:xfrm>
           <a:prstGeom prst="rect">
             <a:avLst/>
@@ -39097,55 +39273,33 @@
         </p:spPr>
         <p:txBody>
           <a:bodyPr anchor="ctr">
-            <a:normAutofit fontScale="88134"/>
+            <a:normAutofit fontScale="75000"/>
           </a:bodyPr>
           <a:lstStyle/>
           <a:p>
             <a:pPr algn="ctr">
               <a:buNone/>
-              <a:defRPr sz="1165" b="1">
-                <a:solidFill>
-                  <a:srgbClr val="000000"/>
-                </a:solidFill>
-                <a:latin typeface="PingFang SC"/>
-                <a:ea typeface="PingFang SC"/>
-                <a:cs typeface="PingFang SC"/>
-              </a:defRPr>
-            </a:pPr>
-            <a:r>
-              <a:rPr sz="1165" b="1">
-                <a:solidFill>
-                  <a:srgbClr val="000000"/>
-                </a:solidFill>
-                <a:latin typeface="PingFang SC"/>
-                <a:ea typeface="PingFang SC"/>
-                <a:cs typeface="PingFang SC"/>
-              </a:rPr>
-              <a:t>核心判断：AI 原生产品底座</a:t>
-            </a:r>
-            <a:r>
-              <a:rPr sz="1165" b="1">
-                <a:solidFill>
-                  <a:srgbClr val="000000"/>
-                </a:solidFill>
-                <a:latin typeface="PingFang SC"/>
-                <a:ea typeface="PingFang SC"/>
-                <a:cs typeface="PingFang SC"/>
-              </a:rPr>
-              <a:t>没有</a:t>
-            </a:r>
-            <a:r>
-              <a:rPr sz="1165" b="1">
-                <a:solidFill>
-                  <a:srgbClr val="000000"/>
-                </a:solidFill>
-                <a:latin typeface="PingFang SC"/>
-                <a:ea typeface="PingFang SC"/>
-                <a:cs typeface="PingFang SC"/>
-              </a:rPr>
-              <a:t>技术架构限制，而是按业务优先级复用、装配和持续演进的产品构建方式。</a:t>
-            </a:r>
-            <a:endParaRPr sz="1165" b="1">
+              <a:defRPr sz="1200" b="1">
+                <a:solidFill>
+                  <a:srgbClr val="000000"/>
+                </a:solidFill>
+                <a:latin typeface="PingFang SC"/>
+                <a:ea typeface="PingFang SC"/>
+                <a:cs typeface="PingFang SC"/>
+              </a:defRPr>
+            </a:pPr>
+            <a:r>
+              <a:rPr sz="1200" b="1">
+                <a:solidFill>
+                  <a:srgbClr val="000000"/>
+                </a:solidFill>
+                <a:latin typeface="PingFang SC"/>
+                <a:ea typeface="PingFang SC"/>
+                <a:cs typeface="PingFang SC"/>
+              </a:rPr>
+              <a:t>关键判断：竞争不只在单个产品，而在能否用同一套底座持续生成、验证和复制产品。</a:t>
+            </a:r>
+            <a:endParaRPr sz="1200" b="1">
               <a:solidFill>
                 <a:srgbClr val="000000"/>
               </a:solidFill>
@@ -39158,7 +39312,7 @@
       </p:sp>
       <p:sp>
         <p:nvSpPr>
-          <p:cNvPr id="41" name="page"/>
+          <p:cNvPr id="45" name="page"/>
           <p:cNvSpPr>
             <a:spLocks noGrp="1"/>
           </p:cNvSpPr>
@@ -39204,7 +39358,7 @@
                 <a:ea typeface="PingFang SC"/>
                 <a:cs typeface="PingFang SC"/>
               </a:rPr>
-              <a:t>33</a:t>
+              <a:t>34</a:t>
             </a:r>
             <a:endParaRPr sz="975">
               <a:solidFill>
@@ -39245,7 +39399,7 @@
       <p:grpSpPr/>
       <p:sp>
         <p:nvSpPr>
-          <p:cNvPr id="2" name="ai-era-title"/>
+          <p:cNvPr id="2" name="title"/>
           <p:cNvSpPr>
             <a:spLocks noGrp="1"/>
           </p:cNvSpPr>
@@ -39273,27 +39427,60 @@
           <a:p>
             <a:pPr algn="l">
               <a:buNone/>
-              <a:defRPr sz="2775" b="1">
-                <a:solidFill>
-                  <a:srgbClr val="000000"/>
-                </a:solidFill>
-                <a:latin typeface="PingFang SC"/>
-                <a:ea typeface="PingFang SC"/>
-                <a:cs typeface="PingFang SC"/>
-              </a:defRPr>
-            </a:pPr>
-            <a:r>
-              <a:rPr sz="2775" b="1">
-                <a:solidFill>
-                  <a:srgbClr val="000000"/>
-                </a:solidFill>
-                <a:latin typeface="PingFang SC"/>
-                <a:ea typeface="PingFang SC"/>
-                <a:cs typeface="PingFang SC"/>
-              </a:rPr>
-              <a:t>AI 时代，智能是刚需，速度即竞争力</a:t>
-            </a:r>
-            <a:endParaRPr sz="2775" b="1">
+              <a:defRPr sz="2850" b="1">
+                <a:solidFill>
+                  <a:srgbClr val="000000"/>
+                </a:solidFill>
+                <a:latin typeface="PingFang SC"/>
+                <a:ea typeface="PingFang SC"/>
+                <a:cs typeface="PingFang SC"/>
+              </a:defRPr>
+            </a:pPr>
+            <a:r>
+              <a:rPr sz="2850" b="1">
+                <a:solidFill>
+                  <a:srgbClr val="000000"/>
+                </a:solidFill>
+                <a:latin typeface="PingFang SC"/>
+                <a:ea typeface="PingFang SC"/>
+                <a:cs typeface="PingFang SC"/>
+              </a:rPr>
+              <a:t>为什么用 AI 原生产品底座构建</a:t>
+            </a:r>
+            <a:r>
+              <a:rPr lang="en-US" sz="2850" b="1">
+                <a:solidFill>
+                  <a:srgbClr val="000000"/>
+                </a:solidFill>
+                <a:latin typeface="PingFang SC"/>
+                <a:ea typeface="PingFang SC"/>
+                <a:cs typeface="PingFang SC"/>
+              </a:rPr>
+              <a:t> -- </a:t>
+            </a:r>
+            <a:r>
+              <a:rPr lang="zh-CN" altLang="en-US" sz="2850" b="1">
+                <a:solidFill>
+                  <a:srgbClr val="000000"/>
+                </a:solidFill>
+                <a:latin typeface="PingFang SC"/>
+                <a:ea typeface="PingFang SC"/>
+                <a:cs typeface="PingFang SC"/>
+              </a:rPr>
+              <a:t>智能、</a:t>
+            </a:r>
+            <a:r>
+              <a:rPr lang="zh-CN" altLang="en-US" sz="2850" b="1">
+                <a:solidFill>
+                  <a:srgbClr val="000000"/>
+                </a:solidFill>
+                <a:latin typeface="PingFang SC"/>
+                <a:ea typeface="PingFang SC"/>
+                <a:cs typeface="PingFang SC"/>
+              </a:rPr>
+              <a:t>高效</a:t>
+            </a:r>
+            <a:endParaRPr lang="zh-CN" altLang="en-US" sz="2850" b="1">
               <a:solidFill>
                 <a:srgbClr val="000000"/>
               </a:solidFill>
@@ -39314,8 +39501,8 @@
         </p:nvSpPr>
         <p:spPr>
           <a:xfrm>
-            <a:off x="400050" y="1390650"/>
-            <a:ext cx="10477500" cy="285750"/>
+            <a:off x="400050" y="1400175"/>
+            <a:ext cx="10382250" cy="285750"/>
           </a:xfrm>
           <a:prstGeom prst="rect">
             <a:avLst/>
@@ -39328,13 +39515,13 @@
         </p:spPr>
         <p:txBody>
           <a:bodyPr anchor="ctr">
-            <a:normAutofit fontScale="89474"/>
+            <a:normAutofit fontScale="94444"/>
           </a:bodyPr>
           <a:lstStyle/>
           <a:p>
             <a:pPr algn="l">
               <a:buNone/>
-              <a:defRPr sz="1425" b="1">
+              <a:defRPr sz="1350">
                 <a:solidFill>
                   <a:srgbClr val="5B6472"/>
                 </a:solidFill>
@@ -39344,7 +39531,7 @@
               </a:defRPr>
             </a:pPr>
             <a:r>
-              <a:rPr sz="1425" b="1">
+              <a:rPr sz="1350">
                 <a:solidFill>
                   <a:srgbClr val="5B6472"/>
                 </a:solidFill>
@@ -39352,9 +39539,9 @@
                 <a:ea typeface="PingFang SC"/>
                 <a:cs typeface="PingFang SC"/>
               </a:rPr>
-              <a:t>AI 原生产品底座 + AI 原生开发模式，是快速形成产品矩阵、试错验证和持续迭代的基础。</a:t>
-            </a:r>
-            <a:endParaRPr sz="1425" b="1">
+              <a:t>底座能力优先复用和装配，让应用更智能、开发更快、场景更广、部署更轻、运营可计量。</a:t>
+            </a:r>
+            <a:endParaRPr sz="1350">
               <a:solidFill>
                 <a:srgbClr val="5B6472"/>
               </a:solidFill>
@@ -39392,26 +39579,26 @@
       </p:sp>
       <p:sp>
         <p:nvSpPr>
-          <p:cNvPr id="5" name="stage-1-card"/>
-          <p:cNvSpPr>
-            <a:spLocks noGrp="1"/>
-          </p:cNvSpPr>
-          <p:nvPr/>
-        </p:nvSpPr>
-        <p:spPr>
-          <a:xfrm>
-            <a:off x="742950" y="2381250"/>
-            <a:ext cx="3143250" cy="2266950"/>
+          <p:cNvPr id="5" name="reason-1-card"/>
+          <p:cNvSpPr>
+            <a:spLocks noGrp="1"/>
+          </p:cNvSpPr>
+          <p:nvPr/>
+        </p:nvSpPr>
+        <p:spPr>
+          <a:xfrm>
+            <a:off x="704850" y="2190750"/>
+            <a:ext cx="3409950" cy="1466850"/>
           </a:xfrm>
           <a:prstGeom prst="roundRect">
             <a:avLst>
-              <a:gd name="adj" fmla="val 2521"/>
+              <a:gd name="adj" fmla="val 3896"/>
             </a:avLst>
           </a:prstGeom>
           <a:solidFill>
             <a:srgbClr val="F3F6FA"/>
           </a:solidFill>
-          <a:ln w="10478">
+          <a:ln w="10954">
             <a:solidFill>
               <a:srgbClr val="C9CED8"/>
             </a:solidFill>
@@ -39421,15 +39608,15 @@
       </p:sp>
       <p:sp>
         <p:nvSpPr>
-          <p:cNvPr id="6" name="stage-1-badge"/>
-          <p:cNvSpPr>
-            <a:spLocks noGrp="1"/>
-          </p:cNvSpPr>
-          <p:nvPr/>
-        </p:nvSpPr>
-        <p:spPr>
-          <a:xfrm>
-            <a:off x="990600" y="2647950"/>
+          <p:cNvPr id="6" name="reason-1-num-bg"/>
+          <p:cNvSpPr>
+            <a:spLocks noGrp="1"/>
+          </p:cNvSpPr>
+          <p:nvPr/>
+        </p:nvSpPr>
+        <p:spPr>
+          <a:xfrm>
+            <a:off x="933450" y="2419350"/>
             <a:ext cx="400050" cy="400050"/>
           </a:xfrm>
           <a:prstGeom prst="ellipse">
@@ -39448,16 +39635,16 @@
       </p:sp>
       <p:sp>
         <p:nvSpPr>
-          <p:cNvPr id="7" name="stage-1-badge-text"/>
-          <p:cNvSpPr>
-            <a:spLocks noGrp="1"/>
-          </p:cNvSpPr>
-          <p:nvPr/>
-        </p:nvSpPr>
-        <p:spPr>
-          <a:xfrm>
-            <a:off x="990600" y="2705100"/>
-            <a:ext cx="400050" cy="247650"/>
+          <p:cNvPr id="7" name="reason-1-num"/>
+          <p:cNvSpPr>
+            <a:spLocks noGrp="1"/>
+          </p:cNvSpPr>
+          <p:nvPr/>
+        </p:nvSpPr>
+        <p:spPr>
+          <a:xfrm>
+            <a:off x="933450" y="2476500"/>
+            <a:ext cx="400050" cy="238125"/>
           </a:xfrm>
           <a:prstGeom prst="rect">
             <a:avLst/>
@@ -39470,13 +39657,13 @@
         </p:spPr>
         <p:txBody>
           <a:bodyPr anchor="ctr">
-            <a:normAutofit fontScale="85417"/>
+            <a:normAutofit fontScale="75490"/>
           </a:bodyPr>
           <a:lstStyle/>
           <a:p>
             <a:pPr algn="ctr">
               <a:buNone/>
-              <a:defRPr sz="1200" b="1">
+              <a:defRPr sz="1275" b="1">
                 <a:solidFill>
                   <a:srgbClr val="FFFFFF"/>
                 </a:solidFill>
@@ -39486,7 +39673,7 @@
               </a:defRPr>
             </a:pPr>
             <a:r>
-              <a:rPr sz="1200" b="1">
+              <a:rPr sz="1275" b="1">
                 <a:solidFill>
                   <a:srgbClr val="FFFFFF"/>
                 </a:solidFill>
@@ -39496,7 +39683,7 @@
               </a:rPr>
               <a:t>01</a:t>
             </a:r>
-            <a:endParaRPr sz="1200" b="1">
+            <a:endParaRPr sz="1275" b="1">
               <a:solidFill>
                 <a:srgbClr val="FFFFFF"/>
               </a:solidFill>
@@ -39509,16 +39696,16 @@
       </p:sp>
       <p:sp>
         <p:nvSpPr>
-          <p:cNvPr id="8" name="stage-1-title"/>
-          <p:cNvSpPr>
-            <a:spLocks noGrp="1"/>
-          </p:cNvSpPr>
-          <p:nvPr/>
-        </p:nvSpPr>
-        <p:spPr>
-          <a:xfrm>
-            <a:off x="1543050" y="2628900"/>
-            <a:ext cx="2038350" cy="304800"/>
+          <p:cNvPr id="8" name="reason-1-title"/>
+          <p:cNvSpPr>
+            <a:spLocks noGrp="1"/>
+          </p:cNvSpPr>
+          <p:nvPr/>
+        </p:nvSpPr>
+        <p:spPr>
+          <a:xfrm>
+            <a:off x="1485900" y="2390775"/>
+            <a:ext cx="2400300" cy="419100"/>
           </a:xfrm>
           <a:prstGeom prst="rect">
             <a:avLst/>
@@ -39531,7 +39718,7 @@
         </p:spPr>
         <p:txBody>
           <a:bodyPr anchor="ctr">
-            <a:normAutofit fontScale="81159"/>
+            <a:normAutofit/>
           </a:bodyPr>
           <a:lstStyle/>
           <a:p>
@@ -39555,7 +39742,7 @@
                 <a:ea typeface="PingFang SC"/>
                 <a:cs typeface="PingFang SC"/>
               </a:rPr>
-              <a:t>共同基础</a:t>
+              <a:t>应用智能</a:t>
             </a:r>
             <a:endParaRPr sz="1725" b="1">
               <a:solidFill>
@@ -39570,16 +39757,43 @@
       </p:sp>
       <p:sp>
         <p:nvSpPr>
-          <p:cNvPr id="9" name="stage-1-subtitle"/>
-          <p:cNvSpPr>
-            <a:spLocks noGrp="1"/>
-          </p:cNvSpPr>
-          <p:nvPr/>
-        </p:nvSpPr>
-        <p:spPr>
-          <a:xfrm>
-            <a:off x="1543050" y="2990850"/>
-            <a:ext cx="2038350" cy="381000"/>
+          <p:cNvPr id="9" name="reason-1-bullet-0"/>
+          <p:cNvSpPr>
+            <a:spLocks noGrp="1"/>
+          </p:cNvSpPr>
+          <p:nvPr/>
+        </p:nvSpPr>
+        <p:spPr>
+          <a:xfrm>
+            <a:off x="1504950" y="3009900"/>
+            <a:ext cx="76200" cy="76200"/>
+          </a:xfrm>
+          <a:prstGeom prst="ellipse">
+            <a:avLst/>
+          </a:prstGeom>
+          <a:solidFill>
+            <a:srgbClr val="2F83FF"/>
+          </a:solidFill>
+          <a:ln w="0">
+            <a:solidFill>
+              <a:srgbClr val="2F83FF"/>
+            </a:solidFill>
+            <a:prstDash val="solid"/>
+          </a:ln>
+        </p:spPr>
+      </p:sp>
+      <p:sp>
+        <p:nvSpPr>
+          <p:cNvPr id="10" name="reason-1-bullet-0-text"/>
+          <p:cNvSpPr>
+            <a:spLocks noGrp="1"/>
+          </p:cNvSpPr>
+          <p:nvPr/>
+        </p:nvSpPr>
+        <p:spPr>
+          <a:xfrm>
+            <a:off x="1714500" y="2914650"/>
+            <a:ext cx="2133600" cy="266700"/>
           </a:xfrm>
           <a:prstGeom prst="rect">
             <a:avLst/>
@@ -39592,13 +39806,13 @@
         </p:spPr>
         <p:txBody>
           <a:bodyPr anchor="t">
-            <a:normAutofit fontScale="81685"/>
+            <a:normAutofit fontScale="85185"/>
           </a:bodyPr>
           <a:lstStyle/>
           <a:p>
             <a:pPr algn="l">
               <a:buNone/>
-              <a:defRPr sz="1165" b="1">
+              <a:defRPr sz="1350" b="1">
                 <a:solidFill>
                   <a:srgbClr val="5B6472"/>
                 </a:solidFill>
@@ -39608,7 +39822,7 @@
               </a:defRPr>
             </a:pPr>
             <a:r>
-              <a:rPr sz="1165" b="1">
+              <a:rPr sz="1350" b="1">
                 <a:solidFill>
                   <a:srgbClr val="5B6472"/>
                 </a:solidFill>
@@ -39616,9 +39830,9 @@
                 <a:ea typeface="PingFang SC"/>
                 <a:cs typeface="PingFang SC"/>
               </a:rPr>
-              <a:t>AI 原生产品底座 + AI 原生开发模式</a:t>
-            </a:r>
-            <a:endParaRPr sz="1165" b="1">
+              <a:t>AI 底层赋能业务</a:t>
+            </a:r>
+            <a:endParaRPr sz="1350" b="1">
               <a:solidFill>
                 <a:srgbClr val="5B6472"/>
               </a:solidFill>
@@ -39631,18 +39845,196 @@
       </p:sp>
       <p:sp>
         <p:nvSpPr>
-          <p:cNvPr id="10" name="stage-1-bullet-0-dot"/>
-          <p:cNvSpPr>
-            <a:spLocks noGrp="1"/>
-          </p:cNvSpPr>
-          <p:nvPr/>
-        </p:nvSpPr>
-        <p:spPr>
-          <a:xfrm>
-            <a:off x="1543050" y="3657600"/>
-            <a:ext cx="57150" cy="57150"/>
-          </a:xfrm>
-          <a:prstGeom prst="rect">
+          <p:cNvPr id="11" name="reason-2-card"/>
+          <p:cNvSpPr>
+            <a:spLocks noGrp="1"/>
+          </p:cNvSpPr>
+          <p:nvPr/>
+        </p:nvSpPr>
+        <p:spPr>
+          <a:xfrm>
+            <a:off x="4400550" y="2190750"/>
+            <a:ext cx="3409950" cy="2038350"/>
+          </a:xfrm>
+          <a:prstGeom prst="roundRect">
+            <a:avLst>
+              <a:gd name="adj" fmla="val 2804"/>
+            </a:avLst>
+          </a:prstGeom>
+          <a:solidFill>
+            <a:srgbClr val="F3F6FA"/>
+          </a:solidFill>
+          <a:ln w="10954">
+            <a:solidFill>
+              <a:srgbClr val="C9CED8"/>
+            </a:solidFill>
+            <a:prstDash val="solid"/>
+          </a:ln>
+        </p:spPr>
+      </p:sp>
+      <p:sp>
+        <p:nvSpPr>
+          <p:cNvPr id="12" name="reason-2-num-bg"/>
+          <p:cNvSpPr>
+            <a:spLocks noGrp="1"/>
+          </p:cNvSpPr>
+          <p:nvPr/>
+        </p:nvSpPr>
+        <p:spPr>
+          <a:xfrm>
+            <a:off x="4629150" y="2419350"/>
+            <a:ext cx="400050" cy="400050"/>
+          </a:xfrm>
+          <a:prstGeom prst="ellipse">
+            <a:avLst/>
+          </a:prstGeom>
+          <a:solidFill>
+            <a:srgbClr val="000000"/>
+          </a:solidFill>
+          <a:ln w="0">
+            <a:solidFill>
+              <a:srgbClr val="000000"/>
+            </a:solidFill>
+            <a:prstDash val="solid"/>
+          </a:ln>
+        </p:spPr>
+      </p:sp>
+      <p:sp>
+        <p:nvSpPr>
+          <p:cNvPr id="13" name="reason-2-num"/>
+          <p:cNvSpPr>
+            <a:spLocks noGrp="1"/>
+          </p:cNvSpPr>
+          <p:nvPr/>
+        </p:nvSpPr>
+        <p:spPr>
+          <a:xfrm>
+            <a:off x="4629150" y="2476500"/>
+            <a:ext cx="400050" cy="238125"/>
+          </a:xfrm>
+          <a:prstGeom prst="rect">
+            <a:avLst/>
+          </a:prstGeom>
+          <a:noFill/>
+          <a:ln w="0">
+            <a:noFill/>
+            <a:prstDash val="solid"/>
+          </a:ln>
+        </p:spPr>
+        <p:txBody>
+          <a:bodyPr anchor="ctr">
+            <a:normAutofit fontScale="75490"/>
+          </a:bodyPr>
+          <a:lstStyle/>
+          <a:p>
+            <a:pPr algn="ctr">
+              <a:buNone/>
+              <a:defRPr sz="1275" b="1">
+                <a:solidFill>
+                  <a:srgbClr val="FFFFFF"/>
+                </a:solidFill>
+                <a:latin typeface="PingFang SC"/>
+                <a:ea typeface="PingFang SC"/>
+                <a:cs typeface="PingFang SC"/>
+              </a:defRPr>
+            </a:pPr>
+            <a:r>
+              <a:rPr sz="1275" b="1">
+                <a:solidFill>
+                  <a:srgbClr val="FFFFFF"/>
+                </a:solidFill>
+                <a:latin typeface="PingFang SC"/>
+                <a:ea typeface="PingFang SC"/>
+                <a:cs typeface="PingFang SC"/>
+              </a:rPr>
+              <a:t>02</a:t>
+            </a:r>
+            <a:endParaRPr sz="1275" b="1">
+              <a:solidFill>
+                <a:srgbClr val="FFFFFF"/>
+              </a:solidFill>
+              <a:latin typeface="PingFang SC"/>
+              <a:ea typeface="PingFang SC"/>
+              <a:cs typeface="PingFang SC"/>
+            </a:endParaRPr>
+          </a:p>
+        </p:txBody>
+      </p:sp>
+      <p:sp>
+        <p:nvSpPr>
+          <p:cNvPr id="14" name="reason-2-title"/>
+          <p:cNvSpPr>
+            <a:spLocks noGrp="1"/>
+          </p:cNvSpPr>
+          <p:nvPr/>
+        </p:nvSpPr>
+        <p:spPr>
+          <a:xfrm>
+            <a:off x="5181600" y="2390775"/>
+            <a:ext cx="2400300" cy="419100"/>
+          </a:xfrm>
+          <a:prstGeom prst="rect">
+            <a:avLst/>
+          </a:prstGeom>
+          <a:noFill/>
+          <a:ln w="0">
+            <a:noFill/>
+            <a:prstDash val="solid"/>
+          </a:ln>
+        </p:spPr>
+        <p:txBody>
+          <a:bodyPr anchor="ctr">
+            <a:normAutofit/>
+          </a:bodyPr>
+          <a:lstStyle/>
+          <a:p>
+            <a:pPr algn="l">
+              <a:buNone/>
+              <a:defRPr sz="1725" b="1">
+                <a:solidFill>
+                  <a:srgbClr val="000000"/>
+                </a:solidFill>
+                <a:latin typeface="PingFang SC"/>
+                <a:ea typeface="PingFang SC"/>
+                <a:cs typeface="PingFang SC"/>
+              </a:defRPr>
+            </a:pPr>
+            <a:r>
+              <a:rPr sz="1725" b="1">
+                <a:solidFill>
+                  <a:srgbClr val="000000"/>
+                </a:solidFill>
+                <a:latin typeface="PingFang SC"/>
+                <a:ea typeface="PingFang SC"/>
+                <a:cs typeface="PingFang SC"/>
+              </a:rPr>
+              <a:t>开发快</a:t>
+            </a:r>
+            <a:endParaRPr sz="1725" b="1">
+              <a:solidFill>
+                <a:srgbClr val="000000"/>
+              </a:solidFill>
+              <a:latin typeface="PingFang SC"/>
+              <a:ea typeface="PingFang SC"/>
+              <a:cs typeface="PingFang SC"/>
+            </a:endParaRPr>
+          </a:p>
+        </p:txBody>
+      </p:sp>
+      <p:sp>
+        <p:nvSpPr>
+          <p:cNvPr id="15" name="reason-2-bullet-0"/>
+          <p:cNvSpPr>
+            <a:spLocks noGrp="1"/>
+          </p:cNvSpPr>
+          <p:nvPr/>
+        </p:nvSpPr>
+        <p:spPr>
+          <a:xfrm>
+            <a:off x="5200650" y="3009900"/>
+            <a:ext cx="76200" cy="76200"/>
+          </a:xfrm>
+          <a:prstGeom prst="ellipse">
             <a:avLst/>
           </a:prstGeom>
           <a:solidFill>
@@ -39658,16 +40050,16 @@
       </p:sp>
       <p:sp>
         <p:nvSpPr>
-          <p:cNvPr id="11" name="stage-1-bullet-0-text"/>
-          <p:cNvSpPr>
-            <a:spLocks noGrp="1"/>
-          </p:cNvSpPr>
-          <p:nvPr/>
-        </p:nvSpPr>
-        <p:spPr>
-          <a:xfrm>
-            <a:off x="1619250" y="3543300"/>
-            <a:ext cx="2171700" cy="266700"/>
+          <p:cNvPr id="16" name="reason-2-bullet-0-text"/>
+          <p:cNvSpPr>
+            <a:spLocks noGrp="1"/>
+          </p:cNvSpPr>
+          <p:nvPr/>
+        </p:nvSpPr>
+        <p:spPr>
+          <a:xfrm>
+            <a:off x="5410200" y="2914650"/>
+            <a:ext cx="2133600" cy="266700"/>
           </a:xfrm>
           <a:prstGeom prst="rect">
             <a:avLst/>
@@ -39680,13 +40072,13 @@
         </p:spPr>
         <p:txBody>
           <a:bodyPr anchor="t">
-            <a:normAutofit fontScale="98882" lnSpcReduction="10000"/>
+            <a:normAutofit fontScale="87586"/>
           </a:bodyPr>
           <a:lstStyle/>
           <a:p>
             <a:pPr algn="l">
               <a:buNone/>
-              <a:defRPr sz="1165" b="1">
+              <a:defRPr sz="1315" b="1">
                 <a:solidFill>
                   <a:srgbClr val="5B6472"/>
                 </a:solidFill>
@@ -39696,7 +40088,7 @@
               </a:defRPr>
             </a:pPr>
             <a:r>
-              <a:rPr sz="1165" b="1">
+              <a:rPr sz="1315" b="1">
                 <a:solidFill>
                   <a:srgbClr val="5B6472"/>
                 </a:solidFill>
@@ -39704,9 +40096,9 @@
                 <a:ea typeface="PingFang SC"/>
                 <a:cs typeface="PingFang SC"/>
               </a:rPr>
-              <a:t>底层架构可复用</a:t>
-            </a:r>
-            <a:endParaRPr sz="1165" b="1">
+              <a:t>更多原子组件开箱即用</a:t>
+            </a:r>
+            <a:endParaRPr sz="1315" b="1">
               <a:solidFill>
                 <a:srgbClr val="5B6472"/>
               </a:solidFill>
@@ -39719,18 +40111,18 @@
       </p:sp>
       <p:sp>
         <p:nvSpPr>
-          <p:cNvPr id="12" name="stage-1-bullet-1-dot"/>
-          <p:cNvSpPr>
-            <a:spLocks noGrp="1"/>
-          </p:cNvSpPr>
-          <p:nvPr/>
-        </p:nvSpPr>
-        <p:spPr>
-          <a:xfrm>
-            <a:off x="1543050" y="4000500"/>
-            <a:ext cx="57150" cy="57150"/>
-          </a:xfrm>
-          <a:prstGeom prst="rect">
+          <p:cNvPr id="17" name="reason-2-bullet-1"/>
+          <p:cNvSpPr>
+            <a:spLocks noGrp="1"/>
+          </p:cNvSpPr>
+          <p:nvPr/>
+        </p:nvSpPr>
+        <p:spPr>
+          <a:xfrm>
+            <a:off x="5200650" y="3333750"/>
+            <a:ext cx="76200" cy="76200"/>
+          </a:xfrm>
+          <a:prstGeom prst="ellipse">
             <a:avLst/>
           </a:prstGeom>
           <a:solidFill>
@@ -39746,16 +40138,16 @@
       </p:sp>
       <p:sp>
         <p:nvSpPr>
-          <p:cNvPr id="13" name="stage-1-bullet-1-text"/>
-          <p:cNvSpPr>
-            <a:spLocks noGrp="1"/>
-          </p:cNvSpPr>
-          <p:nvPr/>
-        </p:nvSpPr>
-        <p:spPr>
-          <a:xfrm>
-            <a:off x="1617980" y="3886200"/>
-            <a:ext cx="2172970" cy="266700"/>
+          <p:cNvPr id="18" name="reason-2-bullet-1-text"/>
+          <p:cNvSpPr>
+            <a:spLocks noGrp="1"/>
+          </p:cNvSpPr>
+          <p:nvPr/>
+        </p:nvSpPr>
+        <p:spPr>
+          <a:xfrm>
+            <a:off x="5410200" y="3238500"/>
+            <a:ext cx="2133600" cy="266700"/>
           </a:xfrm>
           <a:prstGeom prst="rect">
             <a:avLst/>
@@ -39768,13 +40160,13 @@
         </p:spPr>
         <p:txBody>
           <a:bodyPr anchor="t">
-            <a:normAutofit fontScale="98882" lnSpcReduction="10000"/>
+            <a:normAutofit fontScale="87586"/>
           </a:bodyPr>
           <a:lstStyle/>
           <a:p>
             <a:pPr algn="l">
               <a:buNone/>
-              <a:defRPr sz="1165" b="1">
+              <a:defRPr sz="1315" b="1">
                 <a:solidFill>
                   <a:srgbClr val="5B6472"/>
                 </a:solidFill>
@@ -39784,7 +40176,7 @@
               </a:defRPr>
             </a:pPr>
             <a:r>
-              <a:rPr sz="1165" b="1">
+              <a:rPr sz="1315" b="1">
                 <a:solidFill>
                   <a:srgbClr val="5B6472"/>
                 </a:solidFill>
@@ -39792,9 +40184,9 @@
                 <a:ea typeface="PingFang SC"/>
                 <a:cs typeface="PingFang SC"/>
               </a:rPr>
-              <a:t>原子组件可装配</a:t>
-            </a:r>
-            <a:endParaRPr sz="1165" b="1">
+              <a:t>三层架构支撑快速开发</a:t>
+            </a:r>
+            <a:endParaRPr sz="1315" b="1">
               <a:solidFill>
                 <a:srgbClr val="5B6472"/>
               </a:solidFill>
@@ -39807,18 +40199,18 @@
       </p:sp>
       <p:sp>
         <p:nvSpPr>
-          <p:cNvPr id="14" name="stage-1-bullet-2-dot"/>
-          <p:cNvSpPr>
-            <a:spLocks noGrp="1"/>
-          </p:cNvSpPr>
-          <p:nvPr/>
-        </p:nvSpPr>
-        <p:spPr>
-          <a:xfrm>
-            <a:off x="1543050" y="4343400"/>
-            <a:ext cx="57150" cy="57150"/>
-          </a:xfrm>
-          <a:prstGeom prst="rect">
+          <p:cNvPr id="19" name="reason-2-bullet-2"/>
+          <p:cNvSpPr>
+            <a:spLocks noGrp="1"/>
+          </p:cNvSpPr>
+          <p:nvPr/>
+        </p:nvSpPr>
+        <p:spPr>
+          <a:xfrm>
+            <a:off x="5200650" y="3657600"/>
+            <a:ext cx="76200" cy="76200"/>
+          </a:xfrm>
+          <a:prstGeom prst="ellipse">
             <a:avLst/>
           </a:prstGeom>
           <a:solidFill>
@@ -39834,16 +40226,16 @@
       </p:sp>
       <p:sp>
         <p:nvSpPr>
-          <p:cNvPr id="15" name="stage-1-bullet-2-text"/>
-          <p:cNvSpPr>
-            <a:spLocks noGrp="1"/>
-          </p:cNvSpPr>
-          <p:nvPr/>
-        </p:nvSpPr>
-        <p:spPr>
-          <a:xfrm>
-            <a:off x="1617980" y="4229100"/>
-            <a:ext cx="2172970" cy="266700"/>
+          <p:cNvPr id="20" name="reason-2-bullet-2-text"/>
+          <p:cNvSpPr>
+            <a:spLocks noGrp="1"/>
+          </p:cNvSpPr>
+          <p:nvPr/>
+        </p:nvSpPr>
+        <p:spPr>
+          <a:xfrm>
+            <a:off x="5410200" y="3562350"/>
+            <a:ext cx="2133600" cy="266700"/>
           </a:xfrm>
           <a:prstGeom prst="rect">
             <a:avLst/>
@@ -39856,13 +40248,13 @@
         </p:spPr>
         <p:txBody>
           <a:bodyPr anchor="t">
-            <a:normAutofit fontScale="98882" lnSpcReduction="10000"/>
+            <a:noAutofit/>
           </a:bodyPr>
           <a:lstStyle/>
           <a:p>
             <a:pPr algn="l">
               <a:buNone/>
-              <a:defRPr sz="1165" b="1">
+              <a:defRPr sz="1315" b="1">
                 <a:solidFill>
                   <a:srgbClr val="5B6472"/>
                 </a:solidFill>
@@ -39872,7 +40264,7 @@
               </a:defRPr>
             </a:pPr>
             <a:r>
-              <a:rPr sz="1165" b="1">
+              <a:rPr sz="1100" b="1">
                 <a:solidFill>
                   <a:srgbClr val="5B6472"/>
                 </a:solidFill>
@@ -39880,9 +40272,31 @@
                 <a:ea typeface="PingFang SC"/>
                 <a:cs typeface="PingFang SC"/>
               </a:rPr>
-              <a:t>能力沉淀可迁移</a:t>
-            </a:r>
-            <a:endParaRPr sz="1165" b="1">
+              <a:t>AI</a:t>
+            </a:r>
+            <a:r>
+              <a:rPr sz="1100" b="1">
+                <a:solidFill>
+                  <a:srgbClr val="5B6472"/>
+                </a:solidFill>
+                <a:latin typeface="PingFang SC"/>
+                <a:ea typeface="PingFang SC"/>
+                <a:cs typeface="PingFang SC"/>
+              </a:rPr>
+              <a:t>原生</a:t>
+            </a:r>
+            <a:r>
+              <a:rPr sz="1100" b="1">
+                <a:solidFill>
+                  <a:srgbClr val="5B6472"/>
+                </a:solidFill>
+                <a:latin typeface="PingFang SC"/>
+                <a:ea typeface="PingFang SC"/>
+                <a:cs typeface="PingFang SC"/>
+              </a:rPr>
+              <a:t>开发模式</a:t>
+            </a:r>
+            <a:endParaRPr sz="1100" b="1">
               <a:solidFill>
                 <a:srgbClr val="5B6472"/>
               </a:solidFill>
@@ -39895,53 +40309,26 @@
       </p:sp>
       <p:sp>
         <p:nvSpPr>
-          <p:cNvPr id="16" name="arrow-1"/>
-          <p:cNvSpPr>
-            <a:spLocks noGrp="1"/>
-          </p:cNvSpPr>
-          <p:nvPr/>
-        </p:nvSpPr>
-        <p:spPr>
-          <a:xfrm>
-            <a:off x="3976370" y="3352800"/>
-            <a:ext cx="514350" cy="266700"/>
-          </a:xfrm>
-          <a:prstGeom prst="rightArrow">
-            <a:avLst/>
-          </a:prstGeom>
-          <a:solidFill>
-            <a:srgbClr val="B7BDC8"/>
-          </a:solidFill>
-          <a:ln w="0">
-            <a:solidFill>
-              <a:srgbClr val="B7BDC8"/>
-            </a:solidFill>
-            <a:prstDash val="solid"/>
-          </a:ln>
-        </p:spPr>
-      </p:sp>
-      <p:sp>
-        <p:nvSpPr>
-          <p:cNvPr id="17" name="stage-2-card"/>
-          <p:cNvSpPr>
-            <a:spLocks noGrp="1"/>
-          </p:cNvSpPr>
-          <p:nvPr/>
-        </p:nvSpPr>
-        <p:spPr>
-          <a:xfrm>
-            <a:off x="4524375" y="2381250"/>
-            <a:ext cx="3143250" cy="2266950"/>
+          <p:cNvPr id="21" name="reason-3-card"/>
+          <p:cNvSpPr>
+            <a:spLocks noGrp="1"/>
+          </p:cNvSpPr>
+          <p:nvPr/>
+        </p:nvSpPr>
+        <p:spPr>
+          <a:xfrm>
+            <a:off x="8096250" y="2190750"/>
+            <a:ext cx="3409950" cy="1466850"/>
           </a:xfrm>
           <a:prstGeom prst="roundRect">
             <a:avLst>
-              <a:gd name="adj" fmla="val 2521"/>
+              <a:gd name="adj" fmla="val 3896"/>
             </a:avLst>
           </a:prstGeom>
           <a:solidFill>
             <a:srgbClr val="F3F6FA"/>
           </a:solidFill>
-          <a:ln w="10478">
+          <a:ln w="10954">
             <a:solidFill>
               <a:srgbClr val="C9CED8"/>
             </a:solidFill>
@@ -39951,15 +40338,292 @@
       </p:sp>
       <p:sp>
         <p:nvSpPr>
-          <p:cNvPr id="18" name="stage-2-badge"/>
-          <p:cNvSpPr>
-            <a:spLocks noGrp="1"/>
-          </p:cNvSpPr>
-          <p:nvPr/>
-        </p:nvSpPr>
-        <p:spPr>
-          <a:xfrm>
-            <a:off x="4772025" y="2647950"/>
+          <p:cNvPr id="22" name="reason-3-num-bg"/>
+          <p:cNvSpPr>
+            <a:spLocks noGrp="1"/>
+          </p:cNvSpPr>
+          <p:nvPr/>
+        </p:nvSpPr>
+        <p:spPr>
+          <a:xfrm>
+            <a:off x="8324850" y="2419350"/>
+            <a:ext cx="400050" cy="400050"/>
+          </a:xfrm>
+          <a:prstGeom prst="ellipse">
+            <a:avLst/>
+          </a:prstGeom>
+          <a:solidFill>
+            <a:srgbClr val="2F83FF"/>
+          </a:solidFill>
+          <a:ln w="0">
+            <a:solidFill>
+              <a:srgbClr val="2F83FF"/>
+            </a:solidFill>
+            <a:prstDash val="solid"/>
+          </a:ln>
+        </p:spPr>
+      </p:sp>
+      <p:sp>
+        <p:nvSpPr>
+          <p:cNvPr id="23" name="reason-3-num"/>
+          <p:cNvSpPr>
+            <a:spLocks noGrp="1"/>
+          </p:cNvSpPr>
+          <p:nvPr/>
+        </p:nvSpPr>
+        <p:spPr>
+          <a:xfrm>
+            <a:off x="8324850" y="2476500"/>
+            <a:ext cx="400050" cy="238125"/>
+          </a:xfrm>
+          <a:prstGeom prst="rect">
+            <a:avLst/>
+          </a:prstGeom>
+          <a:noFill/>
+          <a:ln w="0">
+            <a:noFill/>
+            <a:prstDash val="solid"/>
+          </a:ln>
+        </p:spPr>
+        <p:txBody>
+          <a:bodyPr anchor="ctr">
+            <a:normAutofit fontScale="75490"/>
+          </a:bodyPr>
+          <a:lstStyle/>
+          <a:p>
+            <a:pPr algn="ctr">
+              <a:buNone/>
+              <a:defRPr sz="1275" b="1">
+                <a:solidFill>
+                  <a:srgbClr val="FFFFFF"/>
+                </a:solidFill>
+                <a:latin typeface="PingFang SC"/>
+                <a:ea typeface="PingFang SC"/>
+                <a:cs typeface="PingFang SC"/>
+              </a:defRPr>
+            </a:pPr>
+            <a:r>
+              <a:rPr sz="1275" b="1">
+                <a:solidFill>
+                  <a:srgbClr val="FFFFFF"/>
+                </a:solidFill>
+                <a:latin typeface="PingFang SC"/>
+                <a:ea typeface="PingFang SC"/>
+                <a:cs typeface="PingFang SC"/>
+              </a:rPr>
+              <a:t>03</a:t>
+            </a:r>
+            <a:endParaRPr sz="1275" b="1">
+              <a:solidFill>
+                <a:srgbClr val="FFFFFF"/>
+              </a:solidFill>
+              <a:latin typeface="PingFang SC"/>
+              <a:ea typeface="PingFang SC"/>
+              <a:cs typeface="PingFang SC"/>
+            </a:endParaRPr>
+          </a:p>
+        </p:txBody>
+      </p:sp>
+      <p:sp>
+        <p:nvSpPr>
+          <p:cNvPr id="24" name="reason-3-title"/>
+          <p:cNvSpPr>
+            <a:spLocks noGrp="1"/>
+          </p:cNvSpPr>
+          <p:nvPr/>
+        </p:nvSpPr>
+        <p:spPr>
+          <a:xfrm>
+            <a:off x="8877300" y="2390775"/>
+            <a:ext cx="2400300" cy="419100"/>
+          </a:xfrm>
+          <a:prstGeom prst="rect">
+            <a:avLst/>
+          </a:prstGeom>
+          <a:noFill/>
+          <a:ln w="0">
+            <a:noFill/>
+            <a:prstDash val="solid"/>
+          </a:ln>
+        </p:spPr>
+        <p:txBody>
+          <a:bodyPr anchor="ctr">
+            <a:normAutofit/>
+          </a:bodyPr>
+          <a:lstStyle/>
+          <a:p>
+            <a:pPr algn="l">
+              <a:buNone/>
+              <a:defRPr sz="1725" b="1">
+                <a:solidFill>
+                  <a:srgbClr val="000000"/>
+                </a:solidFill>
+                <a:latin typeface="PingFang SC"/>
+                <a:ea typeface="PingFang SC"/>
+                <a:cs typeface="PingFang SC"/>
+              </a:defRPr>
+            </a:pPr>
+            <a:r>
+              <a:rPr sz="1725" b="1">
+                <a:solidFill>
+                  <a:srgbClr val="000000"/>
+                </a:solidFill>
+                <a:latin typeface="PingFang SC"/>
+                <a:ea typeface="PingFang SC"/>
+                <a:cs typeface="PingFang SC"/>
+              </a:rPr>
+              <a:t>灵活、</a:t>
+            </a:r>
+            <a:r>
+              <a:rPr sz="1725" b="1">
+                <a:solidFill>
+                  <a:srgbClr val="000000"/>
+                </a:solidFill>
+                <a:latin typeface="PingFang SC"/>
+                <a:ea typeface="PingFang SC"/>
+                <a:cs typeface="PingFang SC"/>
+              </a:rPr>
+              <a:t>场景广泛</a:t>
+            </a:r>
+            <a:endParaRPr sz="1725" b="1">
+              <a:solidFill>
+                <a:srgbClr val="000000"/>
+              </a:solidFill>
+              <a:latin typeface="PingFang SC"/>
+              <a:ea typeface="PingFang SC"/>
+              <a:cs typeface="PingFang SC"/>
+            </a:endParaRPr>
+          </a:p>
+        </p:txBody>
+      </p:sp>
+      <p:sp>
+        <p:nvSpPr>
+          <p:cNvPr id="25" name="reason-3-bullet-0"/>
+          <p:cNvSpPr>
+            <a:spLocks noGrp="1"/>
+          </p:cNvSpPr>
+          <p:nvPr/>
+        </p:nvSpPr>
+        <p:spPr>
+          <a:xfrm>
+            <a:off x="8896350" y="3009900"/>
+            <a:ext cx="76200" cy="76200"/>
+          </a:xfrm>
+          <a:prstGeom prst="ellipse">
+            <a:avLst/>
+          </a:prstGeom>
+          <a:solidFill>
+            <a:srgbClr val="2F83FF"/>
+          </a:solidFill>
+          <a:ln w="0">
+            <a:solidFill>
+              <a:srgbClr val="2F83FF"/>
+            </a:solidFill>
+            <a:prstDash val="solid"/>
+          </a:ln>
+        </p:spPr>
+      </p:sp>
+      <p:sp>
+        <p:nvSpPr>
+          <p:cNvPr id="26" name="reason-3-bullet-0-text"/>
+          <p:cNvSpPr>
+            <a:spLocks noGrp="1"/>
+          </p:cNvSpPr>
+          <p:nvPr/>
+        </p:nvSpPr>
+        <p:spPr>
+          <a:xfrm>
+            <a:off x="9105900" y="2914650"/>
+            <a:ext cx="2133600" cy="266700"/>
+          </a:xfrm>
+          <a:prstGeom prst="rect">
+            <a:avLst/>
+          </a:prstGeom>
+          <a:noFill/>
+          <a:ln w="0">
+            <a:noFill/>
+            <a:prstDash val="solid"/>
+          </a:ln>
+        </p:spPr>
+        <p:txBody>
+          <a:bodyPr anchor="t">
+            <a:normAutofit fontScale="85185"/>
+          </a:bodyPr>
+          <a:lstStyle/>
+          <a:p>
+            <a:pPr algn="l">
+              <a:buNone/>
+              <a:defRPr sz="1350" b="1">
+                <a:solidFill>
+                  <a:srgbClr val="5B6472"/>
+                </a:solidFill>
+                <a:latin typeface="PingFang SC"/>
+                <a:ea typeface="PingFang SC"/>
+                <a:cs typeface="PingFang SC"/>
+              </a:defRPr>
+            </a:pPr>
+            <a:r>
+              <a:rPr sz="1350" b="1">
+                <a:solidFill>
+                  <a:srgbClr val="5B6472"/>
+                </a:solidFill>
+                <a:latin typeface="PingFang SC"/>
+                <a:ea typeface="PingFang SC"/>
+                <a:cs typeface="PingFang SC"/>
+              </a:rPr>
+              <a:t>场景自由装配：研训一体化</a:t>
+            </a:r>
+            <a:endParaRPr sz="1350" b="1">
+              <a:solidFill>
+                <a:srgbClr val="5B6472"/>
+              </a:solidFill>
+              <a:latin typeface="PingFang SC"/>
+              <a:ea typeface="PingFang SC"/>
+              <a:cs typeface="PingFang SC"/>
+            </a:endParaRPr>
+          </a:p>
+        </p:txBody>
+      </p:sp>
+      <p:sp>
+        <p:nvSpPr>
+          <p:cNvPr id="27" name="reason-4-card"/>
+          <p:cNvSpPr>
+            <a:spLocks noGrp="1"/>
+          </p:cNvSpPr>
+          <p:nvPr/>
+        </p:nvSpPr>
+        <p:spPr>
+          <a:xfrm>
+            <a:off x="1752600" y="4400550"/>
+            <a:ext cx="3733800" cy="1466850"/>
+          </a:xfrm>
+          <a:prstGeom prst="roundRect">
+            <a:avLst>
+              <a:gd name="adj" fmla="val 3896"/>
+            </a:avLst>
+          </a:prstGeom>
+          <a:solidFill>
+            <a:srgbClr val="F7F9FC"/>
+          </a:solidFill>
+          <a:ln w="10954">
+            <a:solidFill>
+              <a:srgbClr val="C9CED8"/>
+            </a:solidFill>
+            <a:prstDash val="solid"/>
+          </a:ln>
+        </p:spPr>
+      </p:sp>
+      <p:sp>
+        <p:nvSpPr>
+          <p:cNvPr id="28" name="reason-4-num-bg"/>
+          <p:cNvSpPr>
+            <a:spLocks noGrp="1"/>
+          </p:cNvSpPr>
+          <p:nvPr/>
+        </p:nvSpPr>
+        <p:spPr>
+          <a:xfrm>
+            <a:off x="1981200" y="4629150"/>
             <a:ext cx="400050" cy="400050"/>
           </a:xfrm>
           <a:prstGeom prst="ellipse">
@@ -39978,16 +40642,16 @@
       </p:sp>
       <p:sp>
         <p:nvSpPr>
-          <p:cNvPr id="19" name="stage-2-badge-text"/>
-          <p:cNvSpPr>
-            <a:spLocks noGrp="1"/>
-          </p:cNvSpPr>
-          <p:nvPr/>
-        </p:nvSpPr>
-        <p:spPr>
-          <a:xfrm>
-            <a:off x="4772025" y="2705100"/>
-            <a:ext cx="400050" cy="247650"/>
+          <p:cNvPr id="29" name="reason-4-num"/>
+          <p:cNvSpPr>
+            <a:spLocks noGrp="1"/>
+          </p:cNvSpPr>
+          <p:nvPr/>
+        </p:nvSpPr>
+        <p:spPr>
+          <a:xfrm>
+            <a:off x="1981200" y="4686300"/>
+            <a:ext cx="400050" cy="238125"/>
           </a:xfrm>
           <a:prstGeom prst="rect">
             <a:avLst/>
@@ -40000,13 +40664,13 @@
         </p:spPr>
         <p:txBody>
           <a:bodyPr anchor="ctr">
-            <a:normAutofit fontScale="85417"/>
+            <a:normAutofit fontScale="75490"/>
           </a:bodyPr>
           <a:lstStyle/>
           <a:p>
             <a:pPr algn="ctr">
               <a:buNone/>
-              <a:defRPr sz="1200" b="1">
+              <a:defRPr sz="1275" b="1">
                 <a:solidFill>
                   <a:srgbClr val="FFFFFF"/>
                 </a:solidFill>
@@ -40016,7 +40680,7 @@
               </a:defRPr>
             </a:pPr>
             <a:r>
-              <a:rPr sz="1200" b="1">
+              <a:rPr sz="1275" b="1">
                 <a:solidFill>
                   <a:srgbClr val="FFFFFF"/>
                 </a:solidFill>
@@ -40024,9 +40688,9 @@
                 <a:ea typeface="PingFang SC"/>
                 <a:cs typeface="PingFang SC"/>
               </a:rPr>
-              <a:t>02</a:t>
-            </a:r>
-            <a:endParaRPr sz="1200" b="1">
+              <a:t>04</a:t>
+            </a:r>
+            <a:endParaRPr sz="1275" b="1">
               <a:solidFill>
                 <a:srgbClr val="FFFFFF"/>
               </a:solidFill>
@@ -40039,16 +40703,16 @@
       </p:sp>
       <p:sp>
         <p:nvSpPr>
-          <p:cNvPr id="20" name="stage-2-title"/>
-          <p:cNvSpPr>
-            <a:spLocks noGrp="1"/>
-          </p:cNvSpPr>
-          <p:nvPr/>
-        </p:nvSpPr>
-        <p:spPr>
-          <a:xfrm>
-            <a:off x="5324475" y="2628900"/>
-            <a:ext cx="2038350" cy="304800"/>
+          <p:cNvPr id="30" name="reason-4-title"/>
+          <p:cNvSpPr>
+            <a:spLocks noGrp="1"/>
+          </p:cNvSpPr>
+          <p:nvPr/>
+        </p:nvSpPr>
+        <p:spPr>
+          <a:xfrm>
+            <a:off x="2533650" y="4600575"/>
+            <a:ext cx="2724150" cy="419100"/>
           </a:xfrm>
           <a:prstGeom prst="rect">
             <a:avLst/>
@@ -40061,7 +40725,7 @@
         </p:spPr>
         <p:txBody>
           <a:bodyPr anchor="ctr">
-            <a:normAutofit fontScale="81159"/>
+            <a:normAutofit/>
           </a:bodyPr>
           <a:lstStyle/>
           <a:p>
@@ -40085,7 +40749,7 @@
                 <a:ea typeface="PingFang SC"/>
                 <a:cs typeface="PingFang SC"/>
               </a:rPr>
-              <a:t>产品矩阵</a:t>
+              <a:t>部署轻量</a:t>
             </a:r>
             <a:endParaRPr sz="1725" b="1">
               <a:solidFill>
@@ -40100,16 +40764,43 @@
       </p:sp>
       <p:sp>
         <p:nvSpPr>
-          <p:cNvPr id="21" name="stage-2-subtitle"/>
-          <p:cNvSpPr>
-            <a:spLocks noGrp="1"/>
-          </p:cNvSpPr>
-          <p:nvPr/>
-        </p:nvSpPr>
-        <p:spPr>
-          <a:xfrm>
-            <a:off x="5324475" y="2990850"/>
-            <a:ext cx="2038350" cy="381000"/>
+          <p:cNvPr id="31" name="reason-4-bullet-0"/>
+          <p:cNvSpPr>
+            <a:spLocks noGrp="1"/>
+          </p:cNvSpPr>
+          <p:nvPr/>
+        </p:nvSpPr>
+        <p:spPr>
+          <a:xfrm>
+            <a:off x="2552700" y="5219700"/>
+            <a:ext cx="76200" cy="76200"/>
+          </a:xfrm>
+          <a:prstGeom prst="ellipse">
+            <a:avLst/>
+          </a:prstGeom>
+          <a:solidFill>
+            <a:srgbClr val="2F83FF"/>
+          </a:solidFill>
+          <a:ln w="0">
+            <a:solidFill>
+              <a:srgbClr val="2F83FF"/>
+            </a:solidFill>
+            <a:prstDash val="solid"/>
+          </a:ln>
+        </p:spPr>
+      </p:sp>
+      <p:sp>
+        <p:nvSpPr>
+          <p:cNvPr id="32" name="reason-4-bullet-0-text"/>
+          <p:cNvSpPr>
+            <a:spLocks noGrp="1"/>
+          </p:cNvSpPr>
+          <p:nvPr/>
+        </p:nvSpPr>
+        <p:spPr>
+          <a:xfrm>
+            <a:off x="2762250" y="5124450"/>
+            <a:ext cx="2457450" cy="266700"/>
           </a:xfrm>
           <a:prstGeom prst="rect">
             <a:avLst/>
@@ -40122,13 +40813,13 @@
         </p:spPr>
         <p:txBody>
           <a:bodyPr anchor="t">
-            <a:normAutofit fontScale="81685"/>
+            <a:normAutofit fontScale="85185"/>
           </a:bodyPr>
           <a:lstStyle/>
           <a:p>
             <a:pPr algn="l">
               <a:buNone/>
-              <a:defRPr sz="1165" b="1">
+              <a:defRPr sz="1350" b="1">
                 <a:solidFill>
                   <a:srgbClr val="5B6472"/>
                 </a:solidFill>
@@ -40138,7 +40829,7 @@
               </a:defRPr>
             </a:pPr>
             <a:r>
-              <a:rPr sz="1165" b="1">
+              <a:rPr sz="1350" b="1">
                 <a:solidFill>
                   <a:srgbClr val="5B6472"/>
                 </a:solidFill>
@@ -40146,9 +40837,9 @@
                 <a:ea typeface="PingFang SC"/>
                 <a:cs typeface="PingFang SC"/>
               </a:rPr>
-              <a:t>面向不同垂直场景，快速包装成解决方案</a:t>
-            </a:r>
-            <a:endParaRPr sz="1165" b="1">
+              <a:t>部署效率高、部署成本低</a:t>
+            </a:r>
+            <a:endParaRPr sz="1350" b="1">
               <a:solidFill>
                 <a:srgbClr val="5B6472"/>
               </a:solidFill>
@@ -40161,18 +40852,47 @@
       </p:sp>
       <p:sp>
         <p:nvSpPr>
-          <p:cNvPr id="22" name="stage-2-bullet-0-dot"/>
-          <p:cNvSpPr>
-            <a:spLocks noGrp="1"/>
-          </p:cNvSpPr>
-          <p:nvPr/>
-        </p:nvSpPr>
-        <p:spPr>
-          <a:xfrm>
-            <a:off x="5147945" y="3571240"/>
-            <a:ext cx="57150" cy="57150"/>
-          </a:xfrm>
-          <a:prstGeom prst="rect">
+          <p:cNvPr id="33" name="reason-5-card"/>
+          <p:cNvSpPr>
+            <a:spLocks noGrp="1"/>
+          </p:cNvSpPr>
+          <p:nvPr/>
+        </p:nvSpPr>
+        <p:spPr>
+          <a:xfrm>
+            <a:off x="6705600" y="4400550"/>
+            <a:ext cx="3733800" cy="1466850"/>
+          </a:xfrm>
+          <a:prstGeom prst="roundRect">
+            <a:avLst>
+              <a:gd name="adj" fmla="val 3896"/>
+            </a:avLst>
+          </a:prstGeom>
+          <a:solidFill>
+            <a:srgbClr val="F7F9FC"/>
+          </a:solidFill>
+          <a:ln w="10954">
+            <a:solidFill>
+              <a:srgbClr val="C9CED8"/>
+            </a:solidFill>
+            <a:prstDash val="solid"/>
+          </a:ln>
+        </p:spPr>
+      </p:sp>
+      <p:sp>
+        <p:nvSpPr>
+          <p:cNvPr id="34" name="reason-5-num-bg"/>
+          <p:cNvSpPr>
+            <a:spLocks noGrp="1"/>
+          </p:cNvSpPr>
+          <p:nvPr/>
+        </p:nvSpPr>
+        <p:spPr>
+          <a:xfrm>
+            <a:off x="6934200" y="4629150"/>
+            <a:ext cx="400050" cy="400050"/>
+          </a:xfrm>
+          <a:prstGeom prst="ellipse">
             <a:avLst/>
           </a:prstGeom>
           <a:solidFill>
@@ -40188,57 +40908,57 @@
       </p:sp>
       <p:sp>
         <p:nvSpPr>
-          <p:cNvPr id="23" name="stage-2-bullet-0-text"/>
-          <p:cNvSpPr>
-            <a:spLocks noGrp="1"/>
-          </p:cNvSpPr>
-          <p:nvPr/>
-        </p:nvSpPr>
-        <p:spPr>
-          <a:xfrm>
-            <a:off x="5219700" y="3471545"/>
-            <a:ext cx="2137410" cy="266700"/>
-          </a:xfrm>
-          <a:prstGeom prst="rect">
-            <a:avLst/>
-          </a:prstGeom>
-          <a:noFill/>
-          <a:ln w="0">
-            <a:noFill/>
-            <a:prstDash val="solid"/>
-          </a:ln>
-        </p:spPr>
-        <p:txBody>
-          <a:bodyPr anchor="t">
-            <a:normAutofit fontScale="90943"/>
-          </a:bodyPr>
-          <a:lstStyle/>
-          <a:p>
-            <a:pPr algn="l">
-              <a:buNone/>
-              <a:defRPr sz="1110" b="1">
-                <a:solidFill>
-                  <a:srgbClr val="5B6472"/>
-                </a:solidFill>
-                <a:latin typeface="PingFang SC"/>
-                <a:ea typeface="PingFang SC"/>
-                <a:cs typeface="PingFang SC"/>
-              </a:defRPr>
-            </a:pPr>
-            <a:r>
-              <a:rPr sz="1110" b="1">
-                <a:solidFill>
-                  <a:srgbClr val="5B6472"/>
-                </a:solidFill>
-                <a:latin typeface="PingFang SC"/>
-                <a:ea typeface="PingFang SC"/>
-                <a:cs typeface="PingFang SC"/>
-              </a:rPr>
-              <a:t>通答教学平台 / 通答智能体平台</a:t>
-            </a:r>
-            <a:endParaRPr sz="1110" b="1">
-              <a:solidFill>
-                <a:srgbClr val="5B6472"/>
+          <p:cNvPr id="35" name="reason-5-num"/>
+          <p:cNvSpPr>
+            <a:spLocks noGrp="1"/>
+          </p:cNvSpPr>
+          <p:nvPr/>
+        </p:nvSpPr>
+        <p:spPr>
+          <a:xfrm>
+            <a:off x="6934200" y="4686300"/>
+            <a:ext cx="400050" cy="238125"/>
+          </a:xfrm>
+          <a:prstGeom prst="rect">
+            <a:avLst/>
+          </a:prstGeom>
+          <a:noFill/>
+          <a:ln w="0">
+            <a:noFill/>
+            <a:prstDash val="solid"/>
+          </a:ln>
+        </p:spPr>
+        <p:txBody>
+          <a:bodyPr anchor="ctr">
+            <a:normAutofit fontScale="75490"/>
+          </a:bodyPr>
+          <a:lstStyle/>
+          <a:p>
+            <a:pPr algn="ctr">
+              <a:buNone/>
+              <a:defRPr sz="1275" b="1">
+                <a:solidFill>
+                  <a:srgbClr val="FFFFFF"/>
+                </a:solidFill>
+                <a:latin typeface="PingFang SC"/>
+                <a:ea typeface="PingFang SC"/>
+                <a:cs typeface="PingFang SC"/>
+              </a:defRPr>
+            </a:pPr>
+            <a:r>
+              <a:rPr sz="1275" b="1">
+                <a:solidFill>
+                  <a:srgbClr val="FFFFFF"/>
+                </a:solidFill>
+                <a:latin typeface="PingFang SC"/>
+                <a:ea typeface="PingFang SC"/>
+                <a:cs typeface="PingFang SC"/>
+              </a:rPr>
+              <a:t>05</a:t>
+            </a:r>
+            <a:endParaRPr sz="1275" b="1">
+              <a:solidFill>
+                <a:srgbClr val="FFFFFF"/>
               </a:solidFill>
               <a:latin typeface="PingFang SC"/>
               <a:ea typeface="PingFang SC"/>
@@ -40249,18 +40969,79 @@
       </p:sp>
       <p:sp>
         <p:nvSpPr>
-          <p:cNvPr id="24" name="stage-2-bullet-1-dot"/>
-          <p:cNvSpPr>
-            <a:spLocks noGrp="1"/>
-          </p:cNvSpPr>
-          <p:nvPr/>
-        </p:nvSpPr>
-        <p:spPr>
-          <a:xfrm>
-            <a:off x="5147945" y="3914140"/>
-            <a:ext cx="57150" cy="57150"/>
-          </a:xfrm>
-          <a:prstGeom prst="rect">
+          <p:cNvPr id="36" name="reason-5-title"/>
+          <p:cNvSpPr>
+            <a:spLocks noGrp="1"/>
+          </p:cNvSpPr>
+          <p:nvPr/>
+        </p:nvSpPr>
+        <p:spPr>
+          <a:xfrm>
+            <a:off x="7486650" y="4600575"/>
+            <a:ext cx="2724150" cy="419100"/>
+          </a:xfrm>
+          <a:prstGeom prst="rect">
+            <a:avLst/>
+          </a:prstGeom>
+          <a:noFill/>
+          <a:ln w="0">
+            <a:noFill/>
+            <a:prstDash val="solid"/>
+          </a:ln>
+        </p:spPr>
+        <p:txBody>
+          <a:bodyPr anchor="ctr">
+            <a:normAutofit fontScale="97545"/>
+          </a:bodyPr>
+          <a:lstStyle/>
+          <a:p>
+            <a:pPr algn="l">
+              <a:buNone/>
+              <a:defRPr sz="1575" b="1">
+                <a:solidFill>
+                  <a:srgbClr val="000000"/>
+                </a:solidFill>
+                <a:latin typeface="PingFang SC"/>
+                <a:ea typeface="PingFang SC"/>
+                <a:cs typeface="PingFang SC"/>
+              </a:defRPr>
+            </a:pPr>
+            <a:r>
+              <a:rPr sz="1575" b="1">
+                <a:solidFill>
+                  <a:srgbClr val="000000"/>
+                </a:solidFill>
+                <a:latin typeface="PingFang SC"/>
+                <a:ea typeface="PingFang SC"/>
+                <a:cs typeface="PingFang SC"/>
+              </a:rPr>
+              <a:t>支持 Token 商业模式的落地</a:t>
+            </a:r>
+            <a:endParaRPr sz="1575" b="1">
+              <a:solidFill>
+                <a:srgbClr val="000000"/>
+              </a:solidFill>
+              <a:latin typeface="PingFang SC"/>
+              <a:ea typeface="PingFang SC"/>
+              <a:cs typeface="PingFang SC"/>
+            </a:endParaRPr>
+          </a:p>
+        </p:txBody>
+      </p:sp>
+      <p:sp>
+        <p:nvSpPr>
+          <p:cNvPr id="37" name="reason-5-bullet-0"/>
+          <p:cNvSpPr>
+            <a:spLocks noGrp="1"/>
+          </p:cNvSpPr>
+          <p:nvPr/>
+        </p:nvSpPr>
+        <p:spPr>
+          <a:xfrm>
+            <a:off x="7505700" y="5219700"/>
+            <a:ext cx="76200" cy="76200"/>
+          </a:xfrm>
+          <a:prstGeom prst="ellipse">
             <a:avLst/>
           </a:prstGeom>
           <a:solidFill>
@@ -40276,16 +41057,16 @@
       </p:sp>
       <p:sp>
         <p:nvSpPr>
-          <p:cNvPr id="25" name="stage-2-bullet-1-text"/>
-          <p:cNvSpPr>
-            <a:spLocks noGrp="1"/>
-          </p:cNvSpPr>
-          <p:nvPr/>
-        </p:nvSpPr>
-        <p:spPr>
-          <a:xfrm>
-            <a:off x="5220335" y="3814445"/>
-            <a:ext cx="2136775" cy="266700"/>
+          <p:cNvPr id="38" name="reason-5-bullet-0-text"/>
+          <p:cNvSpPr>
+            <a:spLocks noGrp="1"/>
+          </p:cNvSpPr>
+          <p:nvPr/>
+        </p:nvSpPr>
+        <p:spPr>
+          <a:xfrm>
+            <a:off x="7715250" y="5124450"/>
+            <a:ext cx="2457450" cy="266700"/>
           </a:xfrm>
           <a:prstGeom prst="rect">
             <a:avLst/>
@@ -40298,13 +41079,13 @@
         </p:spPr>
         <p:txBody>
           <a:bodyPr anchor="t">
-            <a:normAutofit fontScale="90943"/>
+            <a:normAutofit fontScale="85185"/>
           </a:bodyPr>
           <a:lstStyle/>
           <a:p>
             <a:pPr algn="l">
               <a:buNone/>
-              <a:defRPr sz="1110" b="1">
+              <a:defRPr sz="1350" b="1">
                 <a:solidFill>
                   <a:srgbClr val="5B6472"/>
                 </a:solidFill>
@@ -40314,7 +41095,7 @@
               </a:defRPr>
             </a:pPr>
             <a:r>
-              <a:rPr sz="1110" b="1">
+              <a:rPr sz="1350" b="1">
                 <a:solidFill>
                   <a:srgbClr val="5B6472"/>
                 </a:solidFill>
@@ -40322,9 +41103,9 @@
                 <a:ea typeface="PingFang SC"/>
                 <a:cs typeface="PingFang SC"/>
               </a:rPr>
-              <a:t>中小学服务平台 / 教师发展平台</a:t>
-            </a:r>
-            <a:endParaRPr sz="1110" b="1">
+              <a:t>大模型治理</a:t>
+            </a:r>
+            <a:endParaRPr sz="1350" b="1">
               <a:solidFill>
                 <a:srgbClr val="5B6472"/>
               </a:solidFill>
@@ -40337,789 +41118,20 @@
       </p:sp>
       <p:sp>
         <p:nvSpPr>
-          <p:cNvPr id="26" name="stage-2-bullet-2-dot"/>
-          <p:cNvSpPr>
-            <a:spLocks noGrp="1"/>
-          </p:cNvSpPr>
-          <p:nvPr/>
-        </p:nvSpPr>
-        <p:spPr>
-          <a:xfrm>
-            <a:off x="5147945" y="4257040"/>
-            <a:ext cx="57150" cy="57150"/>
-          </a:xfrm>
-          <a:prstGeom prst="rect">
-            <a:avLst/>
-          </a:prstGeom>
-          <a:solidFill>
-            <a:srgbClr val="2F83FF"/>
-          </a:solidFill>
-          <a:ln w="0">
-            <a:solidFill>
-              <a:srgbClr val="2F83FF"/>
-            </a:solidFill>
-            <a:prstDash val="solid"/>
-          </a:ln>
-        </p:spPr>
-      </p:sp>
-      <p:sp>
-        <p:nvSpPr>
-          <p:cNvPr id="27" name="stage-2-bullet-2-text"/>
-          <p:cNvSpPr>
-            <a:spLocks noGrp="1"/>
-          </p:cNvSpPr>
-          <p:nvPr/>
-        </p:nvSpPr>
-        <p:spPr>
-          <a:xfrm>
-            <a:off x="5205095" y="4157345"/>
-            <a:ext cx="2152015" cy="266700"/>
-          </a:xfrm>
-          <a:prstGeom prst="rect">
-            <a:avLst/>
-          </a:prstGeom>
-          <a:noFill/>
-          <a:ln w="0">
-            <a:noFill/>
-            <a:prstDash val="solid"/>
-          </a:ln>
-        </p:spPr>
-        <p:txBody>
-          <a:bodyPr anchor="t">
-            <a:normAutofit fontScale="87638"/>
-          </a:bodyPr>
-          <a:lstStyle/>
-          <a:p>
-            <a:pPr algn="l">
-              <a:buNone/>
-              <a:defRPr sz="1110" b="1">
-                <a:solidFill>
-                  <a:srgbClr val="5B6472"/>
-                </a:solidFill>
-                <a:latin typeface="PingFang SC"/>
-                <a:ea typeface="PingFang SC"/>
-                <a:cs typeface="PingFang SC"/>
-              </a:defRPr>
-            </a:pPr>
-            <a:r>
-              <a:rPr sz="1110" b="1">
-                <a:solidFill>
-                  <a:srgbClr val="5B6472"/>
-                </a:solidFill>
-                <a:latin typeface="PingFang SC"/>
-                <a:ea typeface="PingFang SC"/>
-                <a:cs typeface="PingFang SC"/>
-              </a:rPr>
-              <a:t>智慧继教 / 教师（/教学）档案袋</a:t>
-            </a:r>
-            <a:endParaRPr sz="1110" b="1">
-              <a:solidFill>
-                <a:srgbClr val="5B6472"/>
-              </a:solidFill>
-              <a:latin typeface="PingFang SC"/>
-              <a:ea typeface="PingFang SC"/>
-              <a:cs typeface="PingFang SC"/>
-            </a:endParaRPr>
-          </a:p>
-        </p:txBody>
-      </p:sp>
-      <p:sp>
-        <p:nvSpPr>
-          <p:cNvPr id="28" name="arrow-2"/>
-          <p:cNvSpPr>
-            <a:spLocks noGrp="1"/>
-          </p:cNvSpPr>
-          <p:nvPr/>
-        </p:nvSpPr>
-        <p:spPr>
-          <a:xfrm>
-            <a:off x="7757795" y="3352800"/>
-            <a:ext cx="514350" cy="266700"/>
-          </a:xfrm>
-          <a:prstGeom prst="rightArrow">
-            <a:avLst/>
-          </a:prstGeom>
-          <a:solidFill>
-            <a:srgbClr val="B7BDC8"/>
-          </a:solidFill>
-          <a:ln w="0">
-            <a:solidFill>
-              <a:srgbClr val="B7BDC8"/>
-            </a:solidFill>
-            <a:prstDash val="solid"/>
-          </a:ln>
-        </p:spPr>
-      </p:sp>
-      <p:sp>
-        <p:nvSpPr>
-          <p:cNvPr id="29" name="stage-3-card"/>
-          <p:cNvSpPr>
-            <a:spLocks noGrp="1"/>
-          </p:cNvSpPr>
-          <p:nvPr/>
-        </p:nvSpPr>
-        <p:spPr>
-          <a:xfrm>
-            <a:off x="8305800" y="2381250"/>
-            <a:ext cx="3143250" cy="2266950"/>
+          <p:cNvPr id="39" name="judgement-band"/>
+          <p:cNvSpPr>
+            <a:spLocks noGrp="1"/>
+          </p:cNvSpPr>
+          <p:nvPr/>
+        </p:nvSpPr>
+        <p:spPr>
+          <a:xfrm>
+            <a:off x="1219200" y="6076950"/>
+            <a:ext cx="9753600" cy="400050"/>
           </a:xfrm>
           <a:prstGeom prst="roundRect">
             <a:avLst>
-              <a:gd name="adj" fmla="val 2521"/>
-            </a:avLst>
-          </a:prstGeom>
-          <a:solidFill>
-            <a:srgbClr val="F3F6FA"/>
-          </a:solidFill>
-          <a:ln w="10478">
-            <a:solidFill>
-              <a:srgbClr val="C9CED8"/>
-            </a:solidFill>
-            <a:prstDash val="solid"/>
-          </a:ln>
-        </p:spPr>
-      </p:sp>
-      <p:sp>
-        <p:nvSpPr>
-          <p:cNvPr id="30" name="stage-3-badge"/>
-          <p:cNvSpPr>
-            <a:spLocks noGrp="1"/>
-          </p:cNvSpPr>
-          <p:nvPr/>
-        </p:nvSpPr>
-        <p:spPr>
-          <a:xfrm>
-            <a:off x="8553450" y="2647950"/>
-            <a:ext cx="400050" cy="400050"/>
-          </a:xfrm>
-          <a:prstGeom prst="ellipse">
-            <a:avLst/>
-          </a:prstGeom>
-          <a:solidFill>
-            <a:srgbClr val="2F83FF"/>
-          </a:solidFill>
-          <a:ln w="0">
-            <a:solidFill>
-              <a:srgbClr val="2F83FF"/>
-            </a:solidFill>
-            <a:prstDash val="solid"/>
-          </a:ln>
-        </p:spPr>
-      </p:sp>
-      <p:sp>
-        <p:nvSpPr>
-          <p:cNvPr id="31" name="stage-3-badge-text"/>
-          <p:cNvSpPr>
-            <a:spLocks noGrp="1"/>
-          </p:cNvSpPr>
-          <p:nvPr/>
-        </p:nvSpPr>
-        <p:spPr>
-          <a:xfrm>
-            <a:off x="8553450" y="2705100"/>
-            <a:ext cx="400050" cy="247650"/>
-          </a:xfrm>
-          <a:prstGeom prst="rect">
-            <a:avLst/>
-          </a:prstGeom>
-          <a:noFill/>
-          <a:ln w="0">
-            <a:noFill/>
-            <a:prstDash val="solid"/>
-          </a:ln>
-        </p:spPr>
-        <p:txBody>
-          <a:bodyPr anchor="ctr">
-            <a:normAutofit fontScale="85417"/>
-          </a:bodyPr>
-          <a:lstStyle/>
-          <a:p>
-            <a:pPr algn="ctr">
-              <a:buNone/>
-              <a:defRPr sz="1200" b="1">
-                <a:solidFill>
-                  <a:srgbClr val="FFFFFF"/>
-                </a:solidFill>
-                <a:latin typeface="PingFang SC"/>
-                <a:ea typeface="PingFang SC"/>
-                <a:cs typeface="PingFang SC"/>
-              </a:defRPr>
-            </a:pPr>
-            <a:r>
-              <a:rPr sz="1200" b="1">
-                <a:solidFill>
-                  <a:srgbClr val="FFFFFF"/>
-                </a:solidFill>
-                <a:latin typeface="PingFang SC"/>
-                <a:ea typeface="PingFang SC"/>
-                <a:cs typeface="PingFang SC"/>
-              </a:rPr>
-              <a:t>03</a:t>
-            </a:r>
-            <a:endParaRPr sz="1200" b="1">
-              <a:solidFill>
-                <a:srgbClr val="FFFFFF"/>
-              </a:solidFill>
-              <a:latin typeface="PingFang SC"/>
-              <a:ea typeface="PingFang SC"/>
-              <a:cs typeface="PingFang SC"/>
-            </a:endParaRPr>
-          </a:p>
-        </p:txBody>
-      </p:sp>
-      <p:sp>
-        <p:nvSpPr>
-          <p:cNvPr id="32" name="stage-3-title"/>
-          <p:cNvSpPr>
-            <a:spLocks noGrp="1"/>
-          </p:cNvSpPr>
-          <p:nvPr/>
-        </p:nvSpPr>
-        <p:spPr>
-          <a:xfrm>
-            <a:off x="9105900" y="2628900"/>
-            <a:ext cx="2038350" cy="304800"/>
-          </a:xfrm>
-          <a:prstGeom prst="rect">
-            <a:avLst/>
-          </a:prstGeom>
-          <a:noFill/>
-          <a:ln w="0">
-            <a:noFill/>
-            <a:prstDash val="solid"/>
-          </a:ln>
-        </p:spPr>
-        <p:txBody>
-          <a:bodyPr anchor="ctr">
-            <a:normAutofit fontScale="81159"/>
-          </a:bodyPr>
-          <a:lstStyle/>
-          <a:p>
-            <a:pPr algn="l">
-              <a:buNone/>
-              <a:defRPr sz="1725" b="1">
-                <a:solidFill>
-                  <a:srgbClr val="000000"/>
-                </a:solidFill>
-                <a:latin typeface="PingFang SC"/>
-                <a:ea typeface="PingFang SC"/>
-                <a:cs typeface="PingFang SC"/>
-              </a:defRPr>
-            </a:pPr>
-            <a:r>
-              <a:rPr sz="1725" b="1">
-                <a:solidFill>
-                  <a:srgbClr val="000000"/>
-                </a:solidFill>
-                <a:latin typeface="PingFang SC"/>
-                <a:ea typeface="PingFang SC"/>
-                <a:cs typeface="PingFang SC"/>
-              </a:rPr>
-              <a:t>快速迭代</a:t>
-            </a:r>
-            <a:endParaRPr sz="1725" b="1">
-              <a:solidFill>
-                <a:srgbClr val="000000"/>
-              </a:solidFill>
-              <a:latin typeface="PingFang SC"/>
-              <a:ea typeface="PingFang SC"/>
-              <a:cs typeface="PingFang SC"/>
-            </a:endParaRPr>
-          </a:p>
-        </p:txBody>
-      </p:sp>
-      <p:sp>
-        <p:nvSpPr>
-          <p:cNvPr id="33" name="stage-3-subtitle"/>
-          <p:cNvSpPr>
-            <a:spLocks noGrp="1"/>
-          </p:cNvSpPr>
-          <p:nvPr/>
-        </p:nvSpPr>
-        <p:spPr>
-          <a:xfrm>
-            <a:off x="9105900" y="2990850"/>
-            <a:ext cx="2038350" cy="381000"/>
-          </a:xfrm>
-          <a:prstGeom prst="rect">
-            <a:avLst/>
-          </a:prstGeom>
-          <a:noFill/>
-          <a:ln w="0">
-            <a:noFill/>
-            <a:prstDash val="solid"/>
-          </a:ln>
-        </p:spPr>
-        <p:txBody>
-          <a:bodyPr anchor="t">
-            <a:normAutofit fontScale="87907"/>
-          </a:bodyPr>
-          <a:lstStyle/>
-          <a:p>
-            <a:pPr algn="l">
-              <a:buNone/>
-              <a:defRPr sz="1165" b="1">
-                <a:solidFill>
-                  <a:srgbClr val="5B6472"/>
-                </a:solidFill>
-                <a:latin typeface="PingFang SC"/>
-                <a:ea typeface="PingFang SC"/>
-                <a:cs typeface="PingFang SC"/>
-              </a:defRPr>
-            </a:pPr>
-            <a:r>
-              <a:rPr sz="1165" b="1">
-                <a:solidFill>
-                  <a:srgbClr val="5B6472"/>
-                </a:solidFill>
-                <a:latin typeface="PingFang SC"/>
-                <a:ea typeface="PingFang SC"/>
-                <a:cs typeface="PingFang SC"/>
-              </a:rPr>
-              <a:t>上线试错、验证反馈、持续优化</a:t>
-            </a:r>
-            <a:endParaRPr sz="1165" b="1">
-              <a:solidFill>
-                <a:srgbClr val="5B6472"/>
-              </a:solidFill>
-              <a:latin typeface="PingFang SC"/>
-              <a:ea typeface="PingFang SC"/>
-              <a:cs typeface="PingFang SC"/>
-            </a:endParaRPr>
-          </a:p>
-        </p:txBody>
-      </p:sp>
-      <p:sp>
-        <p:nvSpPr>
-          <p:cNvPr id="34" name="stage-3-bullet-0-dot"/>
-          <p:cNvSpPr>
-            <a:spLocks noGrp="1"/>
-          </p:cNvSpPr>
-          <p:nvPr/>
-        </p:nvSpPr>
-        <p:spPr>
-          <a:xfrm>
-            <a:off x="9034145" y="3514090"/>
-            <a:ext cx="57150" cy="57150"/>
-          </a:xfrm>
-          <a:prstGeom prst="rect">
-            <a:avLst/>
-          </a:prstGeom>
-          <a:solidFill>
-            <a:srgbClr val="2F83FF"/>
-          </a:solidFill>
-          <a:ln w="0">
-            <a:solidFill>
-              <a:srgbClr val="2F83FF"/>
-            </a:solidFill>
-            <a:prstDash val="solid"/>
-          </a:ln>
-        </p:spPr>
-      </p:sp>
-      <p:sp>
-        <p:nvSpPr>
-          <p:cNvPr id="35" name="stage-3-bullet-0-text"/>
-          <p:cNvSpPr>
-            <a:spLocks noGrp="1"/>
-          </p:cNvSpPr>
-          <p:nvPr/>
-        </p:nvSpPr>
-        <p:spPr>
-          <a:xfrm>
-            <a:off x="9119235" y="3399790"/>
-            <a:ext cx="2162810" cy="266700"/>
-          </a:xfrm>
-          <a:prstGeom prst="rect">
-            <a:avLst/>
-          </a:prstGeom>
-          <a:noFill/>
-          <a:ln w="0">
-            <a:noFill/>
-            <a:prstDash val="solid"/>
-          </a:ln>
-        </p:spPr>
-        <p:txBody>
-          <a:bodyPr anchor="t">
-            <a:normAutofit fontScale="98882" lnSpcReduction="10000"/>
-          </a:bodyPr>
-          <a:lstStyle/>
-          <a:p>
-            <a:pPr algn="l">
-              <a:buNone/>
-              <a:defRPr sz="1165" b="1">
-                <a:solidFill>
-                  <a:srgbClr val="5B6472"/>
-                </a:solidFill>
-                <a:latin typeface="PingFang SC"/>
-                <a:ea typeface="PingFang SC"/>
-                <a:cs typeface="PingFang SC"/>
-              </a:defRPr>
-            </a:pPr>
-            <a:r>
-              <a:rPr sz="1165" b="1">
-                <a:solidFill>
-                  <a:srgbClr val="5B6472"/>
-                </a:solidFill>
-                <a:latin typeface="PingFang SC"/>
-                <a:ea typeface="PingFang SC"/>
-                <a:cs typeface="PingFang SC"/>
-              </a:rPr>
-              <a:t>小步快跑验证</a:t>
-            </a:r>
-            <a:endParaRPr sz="1165" b="1">
-              <a:solidFill>
-                <a:srgbClr val="5B6472"/>
-              </a:solidFill>
-              <a:latin typeface="PingFang SC"/>
-              <a:ea typeface="PingFang SC"/>
-              <a:cs typeface="PingFang SC"/>
-            </a:endParaRPr>
-          </a:p>
-        </p:txBody>
-      </p:sp>
-      <p:sp>
-        <p:nvSpPr>
-          <p:cNvPr id="36" name="stage-3-bullet-1-dot"/>
-          <p:cNvSpPr>
-            <a:spLocks noGrp="1"/>
-          </p:cNvSpPr>
-          <p:nvPr/>
-        </p:nvSpPr>
-        <p:spPr>
-          <a:xfrm>
-            <a:off x="9034145" y="3856990"/>
-            <a:ext cx="57150" cy="57150"/>
-          </a:xfrm>
-          <a:prstGeom prst="rect">
-            <a:avLst/>
-          </a:prstGeom>
-          <a:solidFill>
-            <a:srgbClr val="2F83FF"/>
-          </a:solidFill>
-          <a:ln w="0">
-            <a:solidFill>
-              <a:srgbClr val="2F83FF"/>
-            </a:solidFill>
-            <a:prstDash val="solid"/>
-          </a:ln>
-        </p:spPr>
-      </p:sp>
-      <p:sp>
-        <p:nvSpPr>
-          <p:cNvPr id="37" name="stage-3-bullet-1-text"/>
-          <p:cNvSpPr>
-            <a:spLocks noGrp="1"/>
-          </p:cNvSpPr>
-          <p:nvPr/>
-        </p:nvSpPr>
-        <p:spPr>
-          <a:xfrm>
-            <a:off x="9145270" y="3742690"/>
-            <a:ext cx="2136775" cy="266700"/>
-          </a:xfrm>
-          <a:prstGeom prst="rect">
-            <a:avLst/>
-          </a:prstGeom>
-          <a:noFill/>
-          <a:ln w="0">
-            <a:noFill/>
-            <a:prstDash val="solid"/>
-          </a:ln>
-        </p:spPr>
-        <p:txBody>
-          <a:bodyPr anchor="t">
-            <a:normAutofit fontScale="98882" lnSpcReduction="10000"/>
-          </a:bodyPr>
-          <a:lstStyle/>
-          <a:p>
-            <a:pPr algn="l">
-              <a:buNone/>
-              <a:defRPr sz="1165" b="1">
-                <a:solidFill>
-                  <a:srgbClr val="5B6472"/>
-                </a:solidFill>
-                <a:latin typeface="PingFang SC"/>
-                <a:ea typeface="PingFang SC"/>
-                <a:cs typeface="PingFang SC"/>
-              </a:defRPr>
-            </a:pPr>
-            <a:r>
-              <a:rPr sz="1165" b="1">
-                <a:solidFill>
-                  <a:srgbClr val="5B6472"/>
-                </a:solidFill>
-                <a:latin typeface="PingFang SC"/>
-                <a:ea typeface="PingFang SC"/>
-                <a:cs typeface="PingFang SC"/>
-              </a:rPr>
-              <a:t>成功能力复用</a:t>
-            </a:r>
-            <a:endParaRPr sz="1165" b="1">
-              <a:solidFill>
-                <a:srgbClr val="5B6472"/>
-              </a:solidFill>
-              <a:latin typeface="PingFang SC"/>
-              <a:ea typeface="PingFang SC"/>
-              <a:cs typeface="PingFang SC"/>
-            </a:endParaRPr>
-          </a:p>
-        </p:txBody>
-      </p:sp>
-      <p:sp>
-        <p:nvSpPr>
-          <p:cNvPr id="38" name="stage-3-bullet-2-dot"/>
-          <p:cNvSpPr>
-            <a:spLocks noGrp="1"/>
-          </p:cNvSpPr>
-          <p:nvPr/>
-        </p:nvSpPr>
-        <p:spPr>
-          <a:xfrm>
-            <a:off x="9034145" y="4199890"/>
-            <a:ext cx="57150" cy="57150"/>
-          </a:xfrm>
-          <a:prstGeom prst="rect">
-            <a:avLst/>
-          </a:prstGeom>
-          <a:solidFill>
-            <a:srgbClr val="2F83FF"/>
-          </a:solidFill>
-          <a:ln w="0">
-            <a:solidFill>
-              <a:srgbClr val="2F83FF"/>
-            </a:solidFill>
-            <a:prstDash val="solid"/>
-          </a:ln>
-        </p:spPr>
-      </p:sp>
-      <p:sp>
-        <p:nvSpPr>
-          <p:cNvPr id="39" name="stage-3-bullet-2-text"/>
-          <p:cNvSpPr>
-            <a:spLocks noGrp="1"/>
-          </p:cNvSpPr>
-          <p:nvPr/>
-        </p:nvSpPr>
-        <p:spPr>
-          <a:xfrm>
-            <a:off x="9145270" y="4085590"/>
-            <a:ext cx="2136775" cy="266700"/>
-          </a:xfrm>
-          <a:prstGeom prst="rect">
-            <a:avLst/>
-          </a:prstGeom>
-          <a:noFill/>
-          <a:ln w="0">
-            <a:noFill/>
-            <a:prstDash val="solid"/>
-          </a:ln>
-        </p:spPr>
-        <p:txBody>
-          <a:bodyPr anchor="t">
-            <a:normAutofit fontScale="98882" lnSpcReduction="10000"/>
-          </a:bodyPr>
-          <a:lstStyle/>
-          <a:p>
-            <a:pPr algn="l">
-              <a:buNone/>
-              <a:defRPr sz="1165" b="1">
-                <a:solidFill>
-                  <a:srgbClr val="5B6472"/>
-                </a:solidFill>
-                <a:latin typeface="PingFang SC"/>
-                <a:ea typeface="PingFang SC"/>
-                <a:cs typeface="PingFang SC"/>
-              </a:defRPr>
-            </a:pPr>
-            <a:r>
-              <a:rPr sz="1165" b="1">
-                <a:solidFill>
-                  <a:srgbClr val="5B6472"/>
-                </a:solidFill>
-                <a:latin typeface="PingFang SC"/>
-                <a:ea typeface="PingFang SC"/>
-                <a:cs typeface="PingFang SC"/>
-              </a:rPr>
-              <a:t>产品形态持续扩展</a:t>
-            </a:r>
-            <a:endParaRPr sz="1165" b="1">
-              <a:solidFill>
-                <a:srgbClr val="5B6472"/>
-              </a:solidFill>
-              <a:latin typeface="PingFang SC"/>
-              <a:ea typeface="PingFang SC"/>
-              <a:cs typeface="PingFang SC"/>
-            </a:endParaRPr>
-          </a:p>
-        </p:txBody>
-      </p:sp>
-      <p:sp>
-        <p:nvSpPr>
-          <p:cNvPr id="40" name="insight-band"/>
-          <p:cNvSpPr>
-            <a:spLocks noGrp="1"/>
-          </p:cNvSpPr>
-          <p:nvPr/>
-        </p:nvSpPr>
-        <p:spPr>
-          <a:xfrm>
-            <a:off x="742950" y="5029200"/>
-            <a:ext cx="10706100" cy="838200"/>
-          </a:xfrm>
-          <a:prstGeom prst="roundRect">
-            <a:avLst>
-              <a:gd name="adj" fmla="val 6818"/>
-            </a:avLst>
-          </a:prstGeom>
-          <a:solidFill>
-            <a:srgbClr val="F7F9FC"/>
-          </a:solidFill>
-          <a:ln w="10478">
-            <a:solidFill>
-              <a:srgbClr val="C9CED8"/>
-            </a:solidFill>
-            <a:prstDash val="solid"/>
-          </a:ln>
-        </p:spPr>
-      </p:sp>
-      <p:sp>
-        <p:nvSpPr>
-          <p:cNvPr id="41" name="insight-title"/>
-          <p:cNvSpPr>
-            <a:spLocks noGrp="1"/>
-          </p:cNvSpPr>
-          <p:nvPr/>
-        </p:nvSpPr>
-        <p:spPr>
-          <a:xfrm>
-            <a:off x="1047750" y="5181600"/>
-            <a:ext cx="4953000" cy="285750"/>
-          </a:xfrm>
-          <a:prstGeom prst="rect">
-            <a:avLst/>
-          </a:prstGeom>
-          <a:noFill/>
-          <a:ln w="0">
-            <a:noFill/>
-            <a:prstDash val="solid"/>
-          </a:ln>
-        </p:spPr>
-        <p:txBody>
-          <a:bodyPr anchor="ctr">
-            <a:normAutofit fontScale="77273"/>
-          </a:bodyPr>
-          <a:lstStyle/>
-          <a:p>
-            <a:pPr algn="l">
-              <a:buNone/>
-              <a:defRPr sz="1650" b="1">
-                <a:solidFill>
-                  <a:srgbClr val="000000"/>
-                </a:solidFill>
-                <a:latin typeface="PingFang SC"/>
-                <a:ea typeface="PingFang SC"/>
-                <a:cs typeface="PingFang SC"/>
-              </a:defRPr>
-            </a:pPr>
-            <a:r>
-              <a:rPr sz="1650" b="1">
-                <a:solidFill>
-                  <a:srgbClr val="000000"/>
-                </a:solidFill>
-                <a:latin typeface="PingFang SC"/>
-                <a:ea typeface="PingFang SC"/>
-                <a:cs typeface="PingFang SC"/>
-              </a:rPr>
-              <a:t>透过现象看本质：外部包装不同，底层根基相同</a:t>
-            </a:r>
-            <a:endParaRPr sz="1650" b="1">
-              <a:solidFill>
-                <a:srgbClr val="000000"/>
-              </a:solidFill>
-              <a:latin typeface="PingFang SC"/>
-              <a:ea typeface="PingFang SC"/>
-              <a:cs typeface="PingFang SC"/>
-            </a:endParaRPr>
-          </a:p>
-        </p:txBody>
-      </p:sp>
-      <p:sp>
-        <p:nvSpPr>
-          <p:cNvPr id="42" name="insight-body"/>
-          <p:cNvSpPr>
-            <a:spLocks noGrp="1"/>
-          </p:cNvSpPr>
-          <p:nvPr/>
-        </p:nvSpPr>
-        <p:spPr>
-          <a:xfrm>
-            <a:off x="1047750" y="5505450"/>
-            <a:ext cx="9620250" cy="247650"/>
-          </a:xfrm>
-          <a:prstGeom prst="rect">
-            <a:avLst/>
-          </a:prstGeom>
-          <a:noFill/>
-          <a:ln w="0">
-            <a:noFill/>
-            <a:prstDash val="solid"/>
-          </a:ln>
-        </p:spPr>
-        <p:txBody>
-          <a:bodyPr anchor="ctr">
-            <a:normAutofit fontScale="80392"/>
-          </a:bodyPr>
-          <a:lstStyle/>
-          <a:p>
-            <a:pPr algn="l">
-              <a:buNone/>
-              <a:defRPr sz="1275" b="1">
-                <a:solidFill>
-                  <a:srgbClr val="5B6472"/>
-                </a:solidFill>
-                <a:latin typeface="PingFang SC"/>
-                <a:ea typeface="PingFang SC"/>
-                <a:cs typeface="PingFang SC"/>
-              </a:defRPr>
-            </a:pPr>
-            <a:r>
-              <a:rPr sz="1275" b="1">
-                <a:solidFill>
-                  <a:srgbClr val="5B6472"/>
-                </a:solidFill>
-                <a:latin typeface="PingFang SC"/>
-                <a:ea typeface="PingFang SC"/>
-                <a:cs typeface="PingFang SC"/>
-              </a:rPr>
-              <a:t>各种产品形态层出不穷，看起来是不同领域的解决方案，本质上都在复用自己的底层技术架构、能力组件、数据资产和开发方法。</a:t>
-            </a:r>
-            <a:endParaRPr sz="1275" b="1">
-              <a:solidFill>
-                <a:srgbClr val="5B6472"/>
-              </a:solidFill>
-              <a:latin typeface="PingFang SC"/>
-              <a:ea typeface="PingFang SC"/>
-              <a:cs typeface="PingFang SC"/>
-            </a:endParaRPr>
-          </a:p>
-        </p:txBody>
-      </p:sp>
-      <p:sp>
-        <p:nvSpPr>
-          <p:cNvPr id="43" name="bottom-judgement"/>
-          <p:cNvSpPr>
-            <a:spLocks noGrp="1"/>
-          </p:cNvSpPr>
-          <p:nvPr/>
-        </p:nvSpPr>
-        <p:spPr>
-          <a:xfrm>
-            <a:off x="1619250" y="6057900"/>
-            <a:ext cx="8953500" cy="381000"/>
-          </a:xfrm>
-          <a:prstGeom prst="roundRect">
-            <a:avLst>
-              <a:gd name="adj" fmla="val 15000"/>
+              <a:gd name="adj" fmla="val 14286"/>
             </a:avLst>
           </a:prstGeom>
           <a:solidFill>
@@ -41135,16 +41147,16 @@
       </p:sp>
       <p:sp>
         <p:nvSpPr>
-          <p:cNvPr id="44" name="bottom-judgement-text"/>
-          <p:cNvSpPr>
-            <a:spLocks noGrp="1"/>
-          </p:cNvSpPr>
-          <p:nvPr/>
-        </p:nvSpPr>
-        <p:spPr>
-          <a:xfrm>
-            <a:off x="1866900" y="6134100"/>
-            <a:ext cx="8458200" cy="228600"/>
+          <p:cNvPr id="40" name="judgement-text"/>
+          <p:cNvSpPr>
+            <a:spLocks noGrp="1"/>
+          </p:cNvSpPr>
+          <p:nvPr/>
+        </p:nvSpPr>
+        <p:spPr>
+          <a:xfrm>
+            <a:off x="1466850" y="6153150"/>
+            <a:ext cx="9258300" cy="247650"/>
           </a:xfrm>
           <a:prstGeom prst="rect">
             <a:avLst/>
@@ -41157,33 +41169,55 @@
         </p:spPr>
         <p:txBody>
           <a:bodyPr anchor="ctr">
-            <a:normAutofit fontScale="75000"/>
+            <a:normAutofit fontScale="88134"/>
           </a:bodyPr>
           <a:lstStyle/>
           <a:p>
             <a:pPr algn="ctr">
               <a:buNone/>
-              <a:defRPr sz="1200" b="1">
-                <a:solidFill>
-                  <a:srgbClr val="000000"/>
-                </a:solidFill>
-                <a:latin typeface="PingFang SC"/>
-                <a:ea typeface="PingFang SC"/>
-                <a:cs typeface="PingFang SC"/>
-              </a:defRPr>
-            </a:pPr>
-            <a:r>
-              <a:rPr sz="1200" b="1">
-                <a:solidFill>
-                  <a:srgbClr val="000000"/>
-                </a:solidFill>
-                <a:latin typeface="PingFang SC"/>
-                <a:ea typeface="PingFang SC"/>
-                <a:cs typeface="PingFang SC"/>
-              </a:rPr>
-              <a:t>关键判断：竞争不只在单个产品，而在能否用同一套底座持续生成、验证和复制产品。</a:t>
-            </a:r>
-            <a:endParaRPr sz="1200" b="1">
+              <a:defRPr sz="1165" b="1">
+                <a:solidFill>
+                  <a:srgbClr val="000000"/>
+                </a:solidFill>
+                <a:latin typeface="PingFang SC"/>
+                <a:ea typeface="PingFang SC"/>
+                <a:cs typeface="PingFang SC"/>
+              </a:defRPr>
+            </a:pPr>
+            <a:r>
+              <a:rPr sz="1165" b="1">
+                <a:solidFill>
+                  <a:srgbClr val="000000"/>
+                </a:solidFill>
+                <a:latin typeface="PingFang SC"/>
+                <a:ea typeface="PingFang SC"/>
+                <a:cs typeface="PingFang SC"/>
+              </a:rPr>
+              <a:t>核心判断：AI 原生产品底座</a:t>
+            </a:r>
+            <a:r>
+              <a:rPr sz="1165" b="1">
+                <a:solidFill>
+                  <a:srgbClr val="000000"/>
+                </a:solidFill>
+                <a:latin typeface="PingFang SC"/>
+                <a:ea typeface="PingFang SC"/>
+                <a:cs typeface="PingFang SC"/>
+              </a:rPr>
+              <a:t>没有</a:t>
+            </a:r>
+            <a:r>
+              <a:rPr sz="1165" b="1">
+                <a:solidFill>
+                  <a:srgbClr val="000000"/>
+                </a:solidFill>
+                <a:latin typeface="PingFang SC"/>
+                <a:ea typeface="PingFang SC"/>
+                <a:cs typeface="PingFang SC"/>
+              </a:rPr>
+              <a:t>技术架构限制，而是按业务优先级复用、装配和持续演进的产品构建方式。</a:t>
+            </a:r>
+            <a:endParaRPr sz="1165" b="1">
               <a:solidFill>
                 <a:srgbClr val="000000"/>
               </a:solidFill>
@@ -41196,7 +41230,7 @@
       </p:sp>
       <p:sp>
         <p:nvSpPr>
-          <p:cNvPr id="45" name="page"/>
+          <p:cNvPr id="41" name="page"/>
           <p:cNvSpPr>
             <a:spLocks noGrp="1"/>
           </p:cNvSpPr>
@@ -41242,7 +41276,7 @@
                 <a:ea typeface="PingFang SC"/>
                 <a:cs typeface="PingFang SC"/>
               </a:rPr>
-              <a:t>34</a:t>
+              <a:t>33</a:t>
             </a:r>
             <a:endParaRPr sz="975">
               <a:solidFill>
@@ -41252,6 +41286,160 @@
               <a:ea typeface="PingFang SC"/>
               <a:cs typeface="PingFang SC"/>
             </a:endParaRPr>
+          </a:p>
+        </p:txBody>
+      </p:sp>
+    </p:spTree>
+  </p:cSld>
+  <p:clrMapOvr>
+    <a:masterClrMapping/>
+  </p:clrMapOvr>
+</p:sld>
+</file>
+
+<file path=ppt/slides/slide35.xml><?xml version="1.0" encoding="utf-8"?>
+<p:sld xmlns:a="http://schemas.openxmlformats.org/drawingml/2006/main" xmlns:r="http://schemas.openxmlformats.org/officeDocument/2006/relationships" xmlns:p="http://schemas.openxmlformats.org/presentationml/2006/main">
+  <p:cSld>
+    <p:spTree>
+      <p:nvGrpSpPr>
+        <p:cNvPr id="1" name=""/>
+        <p:cNvGrpSpPr/>
+        <p:nvPr/>
+      </p:nvGrpSpPr>
+      <p:grpSpPr/>
+      <p:pic>
+        <p:nvPicPr>
+          <p:cNvPr id="2" name="图片 1"/>
+          <p:cNvPicPr>
+            <a:picLocks noChangeAspect="1"/>
+          </p:cNvPicPr>
+          <p:nvPr/>
+        </p:nvPicPr>
+        <p:blipFill>
+          <a:blip r:embed="rId1"/>
+          <a:stretch>
+            <a:fillRect/>
+          </a:stretch>
+        </p:blipFill>
+        <p:spPr>
+          <a:xfrm>
+            <a:off x="1343025" y="669290"/>
+            <a:ext cx="9283700" cy="5843270"/>
+          </a:xfrm>
+          <a:prstGeom prst="rect">
+            <a:avLst/>
+          </a:prstGeom>
+        </p:spPr>
+      </p:pic>
+      <p:sp>
+        <p:nvSpPr>
+          <p:cNvPr id="3" name="title"/>
+          <p:cNvSpPr>
+            <a:spLocks noGrp="1"/>
+          </p:cNvSpPr>
+          <p:nvPr/>
+        </p:nvSpPr>
+        <p:spPr>
+          <a:xfrm>
+            <a:off x="335280" y="116840"/>
+            <a:ext cx="10953750" cy="552450"/>
+          </a:xfrm>
+          <a:prstGeom prst="rect">
+            <a:avLst/>
+          </a:prstGeom>
+          <a:noFill/>
+          <a:ln w="0">
+            <a:noFill/>
+            <a:prstDash val="solid"/>
+          </a:ln>
+        </p:spPr>
+        <p:txBody>
+          <a:bodyPr anchor="t">
+            <a:normAutofit/>
+          </a:bodyPr>
+          <a:lstStyle/>
+          <a:p>
+            <a:pPr algn="l">
+              <a:buNone/>
+              <a:defRPr sz="2850" b="1">
+                <a:solidFill>
+                  <a:srgbClr val="000000"/>
+                </a:solidFill>
+                <a:latin typeface="PingFang SC"/>
+                <a:ea typeface="PingFang SC"/>
+                <a:cs typeface="PingFang SC"/>
+              </a:defRPr>
+            </a:pPr>
+            <a:r>
+              <a:rPr lang="zh-CN" altLang="en-US" sz="2850" b="1">
+                <a:solidFill>
+                  <a:srgbClr val="000000"/>
+                </a:solidFill>
+                <a:latin typeface="PingFang SC"/>
+                <a:ea typeface="PingFang SC"/>
+                <a:cs typeface="PingFang SC"/>
+              </a:rPr>
+              <a:t>附录：</a:t>
+            </a:r>
+            <a:r>
+              <a:rPr lang="en-US" altLang="zh-CN" sz="2850" b="1">
+                <a:solidFill>
+                  <a:srgbClr val="000000"/>
+                </a:solidFill>
+                <a:latin typeface="PingFang SC"/>
+                <a:ea typeface="PingFang SC"/>
+                <a:cs typeface="PingFang SC"/>
+              </a:rPr>
+              <a:t>AI</a:t>
+            </a:r>
+            <a:r>
+              <a:rPr lang="zh-CN" altLang="en-US" sz="2850" b="1">
+                <a:solidFill>
+                  <a:srgbClr val="000000"/>
+                </a:solidFill>
+                <a:latin typeface="PingFang SC"/>
+                <a:ea typeface="PingFang SC"/>
+                <a:cs typeface="PingFang SC"/>
+              </a:rPr>
+              <a:t>原生产品底座规划蓝图</a:t>
+            </a:r>
+            <a:endParaRPr lang="zh-CN" altLang="en-US" sz="2850" b="1">
+              <a:solidFill>
+                <a:srgbClr val="000000"/>
+              </a:solidFill>
+              <a:latin typeface="PingFang SC"/>
+              <a:ea typeface="PingFang SC"/>
+              <a:cs typeface="PingFang SC"/>
+            </a:endParaRPr>
+          </a:p>
+        </p:txBody>
+      </p:sp>
+      <p:sp>
+        <p:nvSpPr>
+          <p:cNvPr id="4" name="文本框 3"/>
+          <p:cNvSpPr txBox="1"/>
+          <p:nvPr/>
+        </p:nvSpPr>
+        <p:spPr>
+          <a:xfrm>
+            <a:off x="1775460" y="6453505"/>
+            <a:ext cx="9085580" cy="368300"/>
+          </a:xfrm>
+          <a:prstGeom prst="rect">
+            <a:avLst/>
+          </a:prstGeom>
+          <a:noFill/>
+        </p:spPr>
+        <p:txBody>
+          <a:bodyPr wrap="square" rtlCol="0" anchor="t">
+            <a:spAutoFit/>
+          </a:bodyPr>
+          <a:p>
+            <a:r>
+              <a:rPr lang="en-US" altLang="zh-CN"/>
+              <a:t>https://guortcorp.feishu.cn/wiki/SceFw5TVIiiYTCkunTJcMUnonbe</a:t>
+            </a:r>
+            <a:endParaRPr lang="zh-CN" altLang="en-US"/>
           </a:p>
         </p:txBody>
       </p:sp>
